--- a/slides/02_Dia_2_Compose_CICD_DevSecOps.pptx
+++ b/slides/02_Dia_2_Compose_CICD_DevSecOps.pptx
@@ -1925,7 +1925,7 @@
     <p:bg>
       <p:bgPr>
         <a:solidFill>
-          <a:srgbClr val="0B1B2B"/>
+          <a:srgbClr val="0A1622"/>
         </a:solidFill>
       </p:bgPr>
     </p:bg>
@@ -1963,6 +1963,13 @@
             <a:srgbClr val="22D3EE"/>
           </a:solidFill>
           <a:ln/>
+          <a:effectLst>
+            <a:outerShdw sx="100000" sy="100000" kx="0" ky="0" algn="bl" rotWithShape="0" blurRad="50800" dist="25400" dir="5400000">
+              <a:srgbClr val="000000">
+                <a:alpha val="40000"/>
+              </a:srgbClr>
+            </a:outerShdw>
+          </a:effectLst>
         </p:spPr>
       </p:sp>
       <p:sp>
@@ -2110,7 +2117,27 @@
       </p:sp>
       <p:sp>
         <p:nvSpPr>
-          <p:cNvPr id="7" name="Text 5"/>
+          <p:cNvPr id="7" name="Shape 5"/>
+          <p:cNvSpPr/>
+          <p:nvPr/>
+        </p:nvSpPr>
+        <p:spPr>
+          <a:xfrm>
+            <a:off x="566928" y="3154680"/>
+            <a:ext cx="1280160" cy="36576"/>
+          </a:xfrm>
+          <a:prstGeom prst="rect">
+            <a:avLst/>
+          </a:prstGeom>
+          <a:solidFill>
+            <a:srgbClr val="22D3EE"/>
+          </a:solidFill>
+          <a:ln/>
+        </p:spPr>
+      </p:sp>
+      <p:sp>
+        <p:nvSpPr>
+          <p:cNvPr id="8" name="Text 6"/>
           <p:cNvSpPr/>
           <p:nvPr/>
         </p:nvSpPr>
@@ -2135,7 +2162,7 @@
             <a:r>
               <a:rPr lang="en-US" sz="1700" dirty="0">
                 <a:solidFill>
-                  <a:srgbClr val="A8B4C4"/>
+                  <a:srgbClr val="9FB0C2"/>
                 </a:solidFill>
                 <a:latin typeface="Calibri" pitchFamily="34" charset="0"/>
                 <a:ea typeface="Calibri" pitchFamily="34" charset="-122"/>
@@ -2149,7 +2176,7 @@
       </p:sp>
       <p:sp>
         <p:nvSpPr>
-          <p:cNvPr id="8" name="Shape 6"/>
+          <p:cNvPr id="9" name="Shape 7"/>
           <p:cNvSpPr/>
           <p:nvPr/>
         </p:nvSpPr>
@@ -2162,14 +2189,14 @@
             <a:avLst/>
           </a:prstGeom>
           <a:solidFill>
-            <a:srgbClr val="284963"/>
+            <a:srgbClr val="264862"/>
           </a:solidFill>
           <a:ln/>
         </p:spPr>
       </p:sp>
       <p:sp>
         <p:nvSpPr>
-          <p:cNvPr id="9" name="Text 7"/>
+          <p:cNvPr id="10" name="Text 8"/>
           <p:cNvSpPr/>
           <p:nvPr/>
         </p:nvSpPr>
@@ -2194,7 +2221,7 @@
             <a:r>
               <a:rPr lang="en-US" sz="1200" dirty="0">
                 <a:solidFill>
-                  <a:srgbClr val="A8B4C4"/>
+                  <a:srgbClr val="9FB0C2"/>
                 </a:solidFill>
                 <a:latin typeface="Consolas" pitchFamily="34" charset="0"/>
                 <a:ea typeface="Consolas" pitchFamily="34" charset="-122"/>
@@ -2220,7 +2247,7 @@
     <p:bg>
       <p:bgPr>
         <a:solidFill>
-          <a:srgbClr val="0B1B2B"/>
+          <a:srgbClr val="0A1622"/>
         </a:solidFill>
       </p:bgPr>
     </p:bg>
@@ -2258,6 +2285,13 @@
             <a:srgbClr val="22D3EE"/>
           </a:solidFill>
           <a:ln/>
+          <a:effectLst>
+            <a:outerShdw sx="100000" sy="100000" kx="0" ky="0" algn="bl" rotWithShape="0" blurRad="50800" dist="25400" dir="5400000">
+              <a:srgbClr val="000000">
+                <a:alpha val="40000"/>
+              </a:srgbClr>
+            </a:outerShdw>
+          </a:effectLst>
         </p:spPr>
       </p:sp>
       <p:sp>
@@ -2287,7 +2321,7 @@
             <a:r>
               <a:rPr lang="en-US" sz="2200" b="1" dirty="0">
                 <a:solidFill>
-                  <a:srgbClr val="0B1B2B"/>
+                  <a:srgbClr val="0A1622"/>
                 </a:solidFill>
                 <a:latin typeface="Consolas" pitchFamily="34" charset="0"/>
                 <a:ea typeface="Consolas" pitchFamily="34" charset="-122"/>
@@ -2385,33 +2419,142 @@
         </p:nvSpPr>
         <p:spPr>
           <a:xfrm>
+            <a:off x="1298448" y="1316736"/>
+            <a:ext cx="1005840" cy="32004"/>
+          </a:xfrm>
+          <a:prstGeom prst="rect">
+            <a:avLst/>
+          </a:prstGeom>
+          <a:solidFill>
+            <a:srgbClr val="22D3EE"/>
+          </a:solidFill>
+          <a:ln/>
+        </p:spPr>
+      </p:sp>
+      <p:sp>
+        <p:nvSpPr>
+          <p:cNvPr id="7" name="Shape 5"/>
+          <p:cNvSpPr/>
+          <p:nvPr/>
+        </p:nvSpPr>
+        <p:spPr>
+          <a:xfrm>
             <a:off x="548640" y="1691640"/>
             <a:ext cx="8046720" cy="2377440"/>
           </a:xfrm>
-          <a:prstGeom prst="rect">
-            <a:avLst/>
+          <a:prstGeom prst="roundRect">
+            <a:avLst>
+              <a:gd name="adj" fmla="val 1346"/>
+            </a:avLst>
           </a:prstGeom>
           <a:solidFill>
-            <a:srgbClr val="081320"/>
+            <a:srgbClr val="060F1A"/>
           </a:solidFill>
           <a:ln w="12700">
             <a:solidFill>
-              <a:srgbClr val="284963"/>
+              <a:srgbClr val="264862"/>
             </a:solidFill>
             <a:prstDash val="solid"/>
           </a:ln>
-        </p:spPr>
-      </p:sp>
-      <p:sp>
-        <p:nvSpPr>
-          <p:cNvPr id="7" name="Text 5"/>
-          <p:cNvSpPr/>
-          <p:nvPr/>
-        </p:nvSpPr>
-        <p:spPr>
-          <a:xfrm>
-            <a:off x="749808" y="1819656"/>
-            <a:ext cx="7644384" cy="2121408"/>
+          <a:effectLst>
+            <a:outerShdw sx="100000" sy="100000" kx="0" ky="0" algn="bl" rotWithShape="0" blurRad="88900" dist="38100" dir="5400000">
+              <a:srgbClr val="000000">
+                <a:alpha val="50000"/>
+              </a:srgbClr>
+            </a:outerShdw>
+          </a:effectLst>
+        </p:spPr>
+      </p:sp>
+      <p:sp>
+        <p:nvSpPr>
+          <p:cNvPr id="8" name="Shape 6"/>
+          <p:cNvSpPr/>
+          <p:nvPr/>
+        </p:nvSpPr>
+        <p:spPr>
+          <a:xfrm>
+            <a:off x="566928" y="1728216"/>
+            <a:ext cx="8010144" cy="274320"/>
+          </a:xfrm>
+          <a:prstGeom prst="rect">
+            <a:avLst/>
+          </a:prstGeom>
+          <a:solidFill>
+            <a:srgbClr val="13283C"/>
+          </a:solidFill>
+          <a:ln/>
+        </p:spPr>
+      </p:sp>
+      <p:sp>
+        <p:nvSpPr>
+          <p:cNvPr id="9" name="Shape 7"/>
+          <p:cNvSpPr/>
+          <p:nvPr/>
+        </p:nvSpPr>
+        <p:spPr>
+          <a:xfrm>
+            <a:off x="713232" y="1801368"/>
+            <a:ext cx="118872" cy="118872"/>
+          </a:xfrm>
+          <a:prstGeom prst="ellipse">
+            <a:avLst/>
+          </a:prstGeom>
+          <a:solidFill>
+            <a:srgbClr val="FB7185"/>
+          </a:solidFill>
+          <a:ln/>
+        </p:spPr>
+      </p:sp>
+      <p:sp>
+        <p:nvSpPr>
+          <p:cNvPr id="10" name="Shape 8"/>
+          <p:cNvSpPr/>
+          <p:nvPr/>
+        </p:nvSpPr>
+        <p:spPr>
+          <a:xfrm>
+            <a:off x="886968" y="1801368"/>
+            <a:ext cx="118872" cy="118872"/>
+          </a:xfrm>
+          <a:prstGeom prst="ellipse">
+            <a:avLst/>
+          </a:prstGeom>
+          <a:solidFill>
+            <a:srgbClr val="FBBF24"/>
+          </a:solidFill>
+          <a:ln/>
+        </p:spPr>
+      </p:sp>
+      <p:sp>
+        <p:nvSpPr>
+          <p:cNvPr id="11" name="Shape 9"/>
+          <p:cNvSpPr/>
+          <p:nvPr/>
+        </p:nvSpPr>
+        <p:spPr>
+          <a:xfrm>
+            <a:off x="1060704" y="1801368"/>
+            <a:ext cx="118872" cy="118872"/>
+          </a:xfrm>
+          <a:prstGeom prst="ellipse">
+            <a:avLst/>
+          </a:prstGeom>
+          <a:solidFill>
+            <a:srgbClr val="34D399"/>
+          </a:solidFill>
+          <a:ln/>
+        </p:spPr>
+      </p:sp>
+      <p:sp>
+        <p:nvSpPr>
+          <p:cNvPr id="12" name="Text 10"/>
+          <p:cNvSpPr/>
+          <p:nvPr/>
+        </p:nvSpPr>
+        <p:spPr>
+          <a:xfrm>
+            <a:off x="768096" y="2112264"/>
+            <a:ext cx="7626096" cy="1828800"/>
           </a:xfrm>
           <a:prstGeom prst="rect">
             <a:avLst/>
@@ -2506,7 +2649,7 @@
       </p:sp>
       <p:sp>
         <p:nvSpPr>
-          <p:cNvPr id="8" name="Text 6"/>
+          <p:cNvPr id="13" name="Text 11"/>
           <p:cNvSpPr/>
           <p:nvPr/>
         </p:nvSpPr>
@@ -2535,7 +2678,7 @@
             <a:r>
               <a:rPr lang="en-US" sz="1400" dirty="0">
                 <a:solidFill>
-                  <a:srgbClr val="E8EEF5"/>
+                  <a:srgbClr val="EAF1F8"/>
                 </a:solidFill>
                 <a:latin typeface="Calibri" pitchFamily="34" charset="0"/>
                 <a:ea typeface="Calibri" pitchFamily="34" charset="-122"/>
@@ -2561,7 +2704,7 @@
     <p:bg>
       <p:bgPr>
         <a:solidFill>
-          <a:srgbClr val="0B1B2B"/>
+          <a:srgbClr val="0A1622"/>
         </a:solidFill>
       </p:bgPr>
     </p:bg>
@@ -2599,6 +2742,13 @@
             <a:srgbClr val="22D3EE"/>
           </a:solidFill>
           <a:ln/>
+          <a:effectLst>
+            <a:outerShdw sx="100000" sy="100000" kx="0" ky="0" algn="bl" rotWithShape="0" blurRad="50800" dist="25400" dir="5400000">
+              <a:srgbClr val="000000">
+                <a:alpha val="40000"/>
+              </a:srgbClr>
+            </a:outerShdw>
+          </a:effectLst>
         </p:spPr>
       </p:sp>
       <p:sp>
@@ -2628,7 +2778,7 @@
             <a:r>
               <a:rPr lang="en-US" sz="2200" b="1" dirty="0">
                 <a:solidFill>
-                  <a:srgbClr val="0B1B2B"/>
+                  <a:srgbClr val="0A1622"/>
                 </a:solidFill>
                 <a:latin typeface="Consolas" pitchFamily="34" charset="0"/>
                 <a:ea typeface="Consolas" pitchFamily="34" charset="-122"/>
@@ -2717,6 +2867,26 @@
             <a:endParaRPr lang="en-US" sz="2500" dirty="0"/>
           </a:p>
         </p:txBody>
+      </p:sp>
+      <p:sp>
+        <p:nvSpPr>
+          <p:cNvPr id="6" name="Shape 4"/>
+          <p:cNvSpPr/>
+          <p:nvPr/>
+        </p:nvSpPr>
+        <p:spPr>
+          <a:xfrm>
+            <a:off x="1298448" y="1316736"/>
+            <a:ext cx="1005840" cy="32004"/>
+          </a:xfrm>
+          <a:prstGeom prst="rect">
+            <a:avLst/>
+          </a:prstGeom>
+          <a:solidFill>
+            <a:srgbClr val="22D3EE"/>
+          </a:solidFill>
+          <a:ln/>
+        </p:spPr>
       </p:sp>
       <p:graphicFrame>
         <p:nvGraphicFramePr>
@@ -2757,7 +2927,7 @@
                       <a:r>
                         <a:rPr lang="en-US" sz="1250" b="1" dirty="0">
                           <a:solidFill>
-                            <a:srgbClr val="0B1B2B"/>
+                            <a:srgbClr val="0A1622"/>
                           </a:solidFill>
                           <a:latin typeface="Calibri" pitchFamily="34" charset="0"/>
                           <a:ea typeface="Calibri" pitchFamily="34" charset="-122"/>
@@ -2772,10 +2942,10 @@
                       </a:endParaRPr>
                     </a:p>
                   </a:txBody>
-                  <a:tcPr marL="50800" marR="50800" marT="50800" marB="50800" anchor="ctr">
+                  <a:tcPr marL="76200" marR="76200" marT="76200" marB="76200" anchor="ctr">
                     <a:lnL w="12700" cap="flat" cmpd="sng" algn="ctr">
                       <a:solidFill>
-                        <a:srgbClr val="284963"/>
+                        <a:srgbClr val="264862"/>
                       </a:solidFill>
                       <a:prstDash val="solid"/>
                       <a:round/>
@@ -2784,7 +2954,7 @@
                     </a:lnL>
                     <a:lnR w="12700" cap="flat" cmpd="sng" algn="ctr">
                       <a:solidFill>
-                        <a:srgbClr val="284963"/>
+                        <a:srgbClr val="264862"/>
                       </a:solidFill>
                       <a:prstDash val="solid"/>
                       <a:round/>
@@ -2793,7 +2963,7 @@
                     </a:lnR>
                     <a:lnT w="12700" cap="flat" cmpd="sng" algn="ctr">
                       <a:solidFill>
-                        <a:srgbClr val="284963"/>
+                        <a:srgbClr val="264862"/>
                       </a:solidFill>
                       <a:prstDash val="solid"/>
                       <a:round/>
@@ -2802,7 +2972,7 @@
                     </a:lnT>
                     <a:lnB w="12700" cap="flat" cmpd="sng" algn="ctr">
                       <a:solidFill>
-                        <a:srgbClr val="284963"/>
+                        <a:srgbClr val="264862"/>
                       </a:solidFill>
                       <a:prstDash val="solid"/>
                       <a:round/>
@@ -2825,7 +2995,7 @@
                       <a:r>
                         <a:rPr lang="en-US" sz="1250" b="1" dirty="0">
                           <a:solidFill>
-                            <a:srgbClr val="0B1B2B"/>
+                            <a:srgbClr val="0A1622"/>
                           </a:solidFill>
                           <a:latin typeface="Calibri" pitchFamily="34" charset="0"/>
                           <a:ea typeface="Calibri" pitchFamily="34" charset="-122"/>
@@ -2840,10 +3010,10 @@
                       </a:endParaRPr>
                     </a:p>
                   </a:txBody>
-                  <a:tcPr marL="50800" marR="50800" marT="50800" marB="50800" anchor="ctr">
+                  <a:tcPr marL="76200" marR="76200" marT="76200" marB="76200" anchor="ctr">
                     <a:lnL w="12700" cap="flat" cmpd="sng" algn="ctr">
                       <a:solidFill>
-                        <a:srgbClr val="284963"/>
+                        <a:srgbClr val="264862"/>
                       </a:solidFill>
                       <a:prstDash val="solid"/>
                       <a:round/>
@@ -2852,7 +3022,7 @@
                     </a:lnL>
                     <a:lnR w="12700" cap="flat" cmpd="sng" algn="ctr">
                       <a:solidFill>
-                        <a:srgbClr val="284963"/>
+                        <a:srgbClr val="264862"/>
                       </a:solidFill>
                       <a:prstDash val="solid"/>
                       <a:round/>
@@ -2861,7 +3031,7 @@
                     </a:lnR>
                     <a:lnT w="12700" cap="flat" cmpd="sng" algn="ctr">
                       <a:solidFill>
-                        <a:srgbClr val="284963"/>
+                        <a:srgbClr val="264862"/>
                       </a:solidFill>
                       <a:prstDash val="solid"/>
                       <a:round/>
@@ -2870,7 +3040,7 @@
                     </a:lnT>
                     <a:lnB w="12700" cap="flat" cmpd="sng" algn="ctr">
                       <a:solidFill>
-                        <a:srgbClr val="284963"/>
+                        <a:srgbClr val="264862"/>
                       </a:solidFill>
                       <a:prstDash val="solid"/>
                       <a:round/>
@@ -2893,7 +3063,7 @@
                       <a:r>
                         <a:rPr lang="en-US" sz="1250" b="1" dirty="0">
                           <a:solidFill>
-                            <a:srgbClr val="0B1B2B"/>
+                            <a:srgbClr val="0A1622"/>
                           </a:solidFill>
                           <a:latin typeface="Calibri" pitchFamily="34" charset="0"/>
                           <a:ea typeface="Calibri" pitchFamily="34" charset="-122"/>
@@ -2908,10 +3078,10 @@
                       </a:endParaRPr>
                     </a:p>
                   </a:txBody>
-                  <a:tcPr marL="50800" marR="50800" marT="50800" marB="50800" anchor="ctr">
+                  <a:tcPr marL="76200" marR="76200" marT="76200" marB="76200" anchor="ctr">
                     <a:lnL w="12700" cap="flat" cmpd="sng" algn="ctr">
                       <a:solidFill>
-                        <a:srgbClr val="284963"/>
+                        <a:srgbClr val="264862"/>
                       </a:solidFill>
                       <a:prstDash val="solid"/>
                       <a:round/>
@@ -2920,7 +3090,7 @@
                     </a:lnL>
                     <a:lnR w="12700" cap="flat" cmpd="sng" algn="ctr">
                       <a:solidFill>
-                        <a:srgbClr val="284963"/>
+                        <a:srgbClr val="264862"/>
                       </a:solidFill>
                       <a:prstDash val="solid"/>
                       <a:round/>
@@ -2929,7 +3099,7 @@
                     </a:lnR>
                     <a:lnT w="12700" cap="flat" cmpd="sng" algn="ctr">
                       <a:solidFill>
-                        <a:srgbClr val="284963"/>
+                        <a:srgbClr val="264862"/>
                       </a:solidFill>
                       <a:prstDash val="solid"/>
                       <a:round/>
@@ -2938,7 +3108,7 @@
                     </a:lnT>
                     <a:lnB w="12700" cap="flat" cmpd="sng" algn="ctr">
                       <a:solidFill>
-                        <a:srgbClr val="284963"/>
+                        <a:srgbClr val="264862"/>
                       </a:solidFill>
                       <a:prstDash val="solid"/>
                       <a:round/>
@@ -2963,7 +3133,7 @@
                       <a:r>
                         <a:rPr lang="en-US" sz="1150" dirty="0">
                           <a:solidFill>
-                            <a:srgbClr val="E8EEF5"/>
+                            <a:srgbClr val="EAF1F8"/>
                           </a:solidFill>
                           <a:latin typeface="Calibri" pitchFamily="34" charset="0"/>
                           <a:ea typeface="Calibri" pitchFamily="34" charset="-122"/>
@@ -2978,10 +3148,10 @@
                       </a:endParaRPr>
                     </a:p>
                   </a:txBody>
-                  <a:tcPr marL="50800" marR="50800" marT="50800" marB="50800" anchor="ctr">
+                  <a:tcPr marL="76200" marR="76200" marT="76200" marB="76200" anchor="ctr">
                     <a:lnL w="12700" cap="flat" cmpd="sng" algn="ctr">
                       <a:solidFill>
-                        <a:srgbClr val="284963"/>
+                        <a:srgbClr val="264862"/>
                       </a:solidFill>
                       <a:prstDash val="solid"/>
                       <a:round/>
@@ -2990,7 +3160,7 @@
                     </a:lnL>
                     <a:lnR w="12700" cap="flat" cmpd="sng" algn="ctr">
                       <a:solidFill>
-                        <a:srgbClr val="284963"/>
+                        <a:srgbClr val="264862"/>
                       </a:solidFill>
                       <a:prstDash val="solid"/>
                       <a:round/>
@@ -2999,7 +3169,7 @@
                     </a:lnR>
                     <a:lnT w="12700" cap="flat" cmpd="sng" algn="ctr">
                       <a:solidFill>
-                        <a:srgbClr val="284963"/>
+                        <a:srgbClr val="264862"/>
                       </a:solidFill>
                       <a:prstDash val="solid"/>
                       <a:round/>
@@ -3008,7 +3178,7 @@
                     </a:lnT>
                     <a:lnB w="12700" cap="flat" cmpd="sng" algn="ctr">
                       <a:solidFill>
-                        <a:srgbClr val="284963"/>
+                        <a:srgbClr val="264862"/>
                       </a:solidFill>
                       <a:prstDash val="solid"/>
                       <a:round/>
@@ -3016,7 +3186,7 @@
                       <a:tailEnd type="none" w="med" len="med"/>
                     </a:lnB>
                     <a:solidFill>
-                      <a:srgbClr val="16314A"/>
+                      <a:srgbClr val="0F2133"/>
                     </a:solidFill>
                   </a:tcPr>
                 </a:tc>
@@ -3031,7 +3201,7 @@
                       <a:r>
                         <a:rPr lang="en-US" sz="1150" dirty="0">
                           <a:solidFill>
-                            <a:srgbClr val="E8EEF5"/>
+                            <a:srgbClr val="EAF1F8"/>
                           </a:solidFill>
                           <a:latin typeface="Calibri" pitchFamily="34" charset="0"/>
                           <a:ea typeface="Calibri" pitchFamily="34" charset="-122"/>
@@ -3046,10 +3216,10 @@
                       </a:endParaRPr>
                     </a:p>
                   </a:txBody>
-                  <a:tcPr marL="50800" marR="50800" marT="50800" marB="50800" anchor="ctr">
+                  <a:tcPr marL="76200" marR="76200" marT="76200" marB="76200" anchor="ctr">
                     <a:lnL w="12700" cap="flat" cmpd="sng" algn="ctr">
                       <a:solidFill>
-                        <a:srgbClr val="284963"/>
+                        <a:srgbClr val="264862"/>
                       </a:solidFill>
                       <a:prstDash val="solid"/>
                       <a:round/>
@@ -3058,7 +3228,7 @@
                     </a:lnL>
                     <a:lnR w="12700" cap="flat" cmpd="sng" algn="ctr">
                       <a:solidFill>
-                        <a:srgbClr val="284963"/>
+                        <a:srgbClr val="264862"/>
                       </a:solidFill>
                       <a:prstDash val="solid"/>
                       <a:round/>
@@ -3067,7 +3237,7 @@
                     </a:lnR>
                     <a:lnT w="12700" cap="flat" cmpd="sng" algn="ctr">
                       <a:solidFill>
-                        <a:srgbClr val="284963"/>
+                        <a:srgbClr val="264862"/>
                       </a:solidFill>
                       <a:prstDash val="solid"/>
                       <a:round/>
@@ -3076,7 +3246,7 @@
                     </a:lnT>
                     <a:lnB w="12700" cap="flat" cmpd="sng" algn="ctr">
                       <a:solidFill>
-                        <a:srgbClr val="284963"/>
+                        <a:srgbClr val="264862"/>
                       </a:solidFill>
                       <a:prstDash val="solid"/>
                       <a:round/>
@@ -3084,7 +3254,7 @@
                       <a:tailEnd type="none" w="med" len="med"/>
                     </a:lnB>
                     <a:solidFill>
-                      <a:srgbClr val="16314A"/>
+                      <a:srgbClr val="0F2133"/>
                     </a:solidFill>
                   </a:tcPr>
                 </a:tc>
@@ -3099,7 +3269,7 @@
                       <a:r>
                         <a:rPr lang="en-US" sz="1150" dirty="0">
                           <a:solidFill>
-                            <a:srgbClr val="E8EEF5"/>
+                            <a:srgbClr val="EAF1F8"/>
                           </a:solidFill>
                           <a:latin typeface="Calibri" pitchFamily="34" charset="0"/>
                           <a:ea typeface="Calibri" pitchFamily="34" charset="-122"/>
@@ -3114,10 +3284,10 @@
                       </a:endParaRPr>
                     </a:p>
                   </a:txBody>
-                  <a:tcPr marL="50800" marR="50800" marT="50800" marB="50800" anchor="ctr">
+                  <a:tcPr marL="76200" marR="76200" marT="76200" marB="76200" anchor="ctr">
                     <a:lnL w="12700" cap="flat" cmpd="sng" algn="ctr">
                       <a:solidFill>
-                        <a:srgbClr val="284963"/>
+                        <a:srgbClr val="264862"/>
                       </a:solidFill>
                       <a:prstDash val="solid"/>
                       <a:round/>
@@ -3126,7 +3296,7 @@
                     </a:lnL>
                     <a:lnR w="12700" cap="flat" cmpd="sng" algn="ctr">
                       <a:solidFill>
-                        <a:srgbClr val="284963"/>
+                        <a:srgbClr val="264862"/>
                       </a:solidFill>
                       <a:prstDash val="solid"/>
                       <a:round/>
@@ -3135,7 +3305,7 @@
                     </a:lnR>
                     <a:lnT w="12700" cap="flat" cmpd="sng" algn="ctr">
                       <a:solidFill>
-                        <a:srgbClr val="284963"/>
+                        <a:srgbClr val="264862"/>
                       </a:solidFill>
                       <a:prstDash val="solid"/>
                       <a:round/>
@@ -3144,7 +3314,7 @@
                     </a:lnT>
                     <a:lnB w="12700" cap="flat" cmpd="sng" algn="ctr">
                       <a:solidFill>
-                        <a:srgbClr val="284963"/>
+                        <a:srgbClr val="264862"/>
                       </a:solidFill>
                       <a:prstDash val="solid"/>
                       <a:round/>
@@ -3152,7 +3322,7 @@
                       <a:tailEnd type="none" w="med" len="med"/>
                     </a:lnB>
                     <a:solidFill>
-                      <a:srgbClr val="16314A"/>
+                      <a:srgbClr val="0F2133"/>
                     </a:solidFill>
                   </a:tcPr>
                 </a:tc>
@@ -3169,7 +3339,7 @@
                       <a:r>
                         <a:rPr lang="en-US" sz="1150" dirty="0">
                           <a:solidFill>
-                            <a:srgbClr val="E8EEF5"/>
+                            <a:srgbClr val="EAF1F8"/>
                           </a:solidFill>
                           <a:latin typeface="Calibri" pitchFamily="34" charset="0"/>
                           <a:ea typeface="Calibri" pitchFamily="34" charset="-122"/>
@@ -3184,10 +3354,10 @@
                       </a:endParaRPr>
                     </a:p>
                   </a:txBody>
-                  <a:tcPr marL="50800" marR="50800" marT="50800" marB="50800" anchor="ctr">
+                  <a:tcPr marL="76200" marR="76200" marT="76200" marB="76200" anchor="ctr">
                     <a:lnL w="12700" cap="flat" cmpd="sng" algn="ctr">
                       <a:solidFill>
-                        <a:srgbClr val="284963"/>
+                        <a:srgbClr val="264862"/>
                       </a:solidFill>
                       <a:prstDash val="solid"/>
                       <a:round/>
@@ -3196,7 +3366,7 @@
                     </a:lnL>
                     <a:lnR w="12700" cap="flat" cmpd="sng" algn="ctr">
                       <a:solidFill>
-                        <a:srgbClr val="284963"/>
+                        <a:srgbClr val="264862"/>
                       </a:solidFill>
                       <a:prstDash val="solid"/>
                       <a:round/>
@@ -3205,7 +3375,7 @@
                     </a:lnR>
                     <a:lnT w="12700" cap="flat" cmpd="sng" algn="ctr">
                       <a:solidFill>
-                        <a:srgbClr val="284963"/>
+                        <a:srgbClr val="264862"/>
                       </a:solidFill>
                       <a:prstDash val="solid"/>
                       <a:round/>
@@ -3214,7 +3384,7 @@
                     </a:lnT>
                     <a:lnB w="12700" cap="flat" cmpd="sng" algn="ctr">
                       <a:solidFill>
-                        <a:srgbClr val="284963"/>
+                        <a:srgbClr val="264862"/>
                       </a:solidFill>
                       <a:prstDash val="solid"/>
                       <a:round/>
@@ -3222,7 +3392,7 @@
                       <a:tailEnd type="none" w="med" len="med"/>
                     </a:lnB>
                     <a:solidFill>
-                      <a:srgbClr val="12293D"/>
+                      <a:srgbClr val="13283C"/>
                     </a:solidFill>
                   </a:tcPr>
                 </a:tc>
@@ -3237,7 +3407,7 @@
                       <a:r>
                         <a:rPr lang="en-US" sz="1150" dirty="0">
                           <a:solidFill>
-                            <a:srgbClr val="E8EEF5"/>
+                            <a:srgbClr val="EAF1F8"/>
                           </a:solidFill>
                           <a:latin typeface="Calibri" pitchFamily="34" charset="0"/>
                           <a:ea typeface="Calibri" pitchFamily="34" charset="-122"/>
@@ -3252,10 +3422,10 @@
                       </a:endParaRPr>
                     </a:p>
                   </a:txBody>
-                  <a:tcPr marL="50800" marR="50800" marT="50800" marB="50800" anchor="ctr">
+                  <a:tcPr marL="76200" marR="76200" marT="76200" marB="76200" anchor="ctr">
                     <a:lnL w="12700" cap="flat" cmpd="sng" algn="ctr">
                       <a:solidFill>
-                        <a:srgbClr val="284963"/>
+                        <a:srgbClr val="264862"/>
                       </a:solidFill>
                       <a:prstDash val="solid"/>
                       <a:round/>
@@ -3264,7 +3434,7 @@
                     </a:lnL>
                     <a:lnR w="12700" cap="flat" cmpd="sng" algn="ctr">
                       <a:solidFill>
-                        <a:srgbClr val="284963"/>
+                        <a:srgbClr val="264862"/>
                       </a:solidFill>
                       <a:prstDash val="solid"/>
                       <a:round/>
@@ -3273,7 +3443,7 @@
                     </a:lnR>
                     <a:lnT w="12700" cap="flat" cmpd="sng" algn="ctr">
                       <a:solidFill>
-                        <a:srgbClr val="284963"/>
+                        <a:srgbClr val="264862"/>
                       </a:solidFill>
                       <a:prstDash val="solid"/>
                       <a:round/>
@@ -3282,7 +3452,7 @@
                     </a:lnT>
                     <a:lnB w="12700" cap="flat" cmpd="sng" algn="ctr">
                       <a:solidFill>
-                        <a:srgbClr val="284963"/>
+                        <a:srgbClr val="264862"/>
                       </a:solidFill>
                       <a:prstDash val="solid"/>
                       <a:round/>
@@ -3290,7 +3460,7 @@
                       <a:tailEnd type="none" w="med" len="med"/>
                     </a:lnB>
                     <a:solidFill>
-                      <a:srgbClr val="12293D"/>
+                      <a:srgbClr val="13283C"/>
                     </a:solidFill>
                   </a:tcPr>
                 </a:tc>
@@ -3305,7 +3475,7 @@
                       <a:r>
                         <a:rPr lang="en-US" sz="1150" dirty="0">
                           <a:solidFill>
-                            <a:srgbClr val="E8EEF5"/>
+                            <a:srgbClr val="EAF1F8"/>
                           </a:solidFill>
                           <a:latin typeface="Calibri" pitchFamily="34" charset="0"/>
                           <a:ea typeface="Calibri" pitchFamily="34" charset="-122"/>
@@ -3320,10 +3490,10 @@
                       </a:endParaRPr>
                     </a:p>
                   </a:txBody>
-                  <a:tcPr marL="50800" marR="50800" marT="50800" marB="50800" anchor="ctr">
+                  <a:tcPr marL="76200" marR="76200" marT="76200" marB="76200" anchor="ctr">
                     <a:lnL w="12700" cap="flat" cmpd="sng" algn="ctr">
                       <a:solidFill>
-                        <a:srgbClr val="284963"/>
+                        <a:srgbClr val="264862"/>
                       </a:solidFill>
                       <a:prstDash val="solid"/>
                       <a:round/>
@@ -3332,7 +3502,7 @@
                     </a:lnL>
                     <a:lnR w="12700" cap="flat" cmpd="sng" algn="ctr">
                       <a:solidFill>
-                        <a:srgbClr val="284963"/>
+                        <a:srgbClr val="264862"/>
                       </a:solidFill>
                       <a:prstDash val="solid"/>
                       <a:round/>
@@ -3341,7 +3511,7 @@
                     </a:lnR>
                     <a:lnT w="12700" cap="flat" cmpd="sng" algn="ctr">
                       <a:solidFill>
-                        <a:srgbClr val="284963"/>
+                        <a:srgbClr val="264862"/>
                       </a:solidFill>
                       <a:prstDash val="solid"/>
                       <a:round/>
@@ -3350,7 +3520,7 @@
                     </a:lnT>
                     <a:lnB w="12700" cap="flat" cmpd="sng" algn="ctr">
                       <a:solidFill>
-                        <a:srgbClr val="284963"/>
+                        <a:srgbClr val="264862"/>
                       </a:solidFill>
                       <a:prstDash val="solid"/>
                       <a:round/>
@@ -3358,7 +3528,7 @@
                       <a:tailEnd type="none" w="med" len="med"/>
                     </a:lnB>
                     <a:solidFill>
-                      <a:srgbClr val="12293D"/>
+                      <a:srgbClr val="13283C"/>
                     </a:solidFill>
                   </a:tcPr>
                 </a:tc>
@@ -3375,7 +3545,7 @@
                       <a:r>
                         <a:rPr lang="en-US" sz="1150" dirty="0">
                           <a:solidFill>
-                            <a:srgbClr val="E8EEF5"/>
+                            <a:srgbClr val="EAF1F8"/>
                           </a:solidFill>
                           <a:latin typeface="Calibri" pitchFamily="34" charset="0"/>
                           <a:ea typeface="Calibri" pitchFamily="34" charset="-122"/>
@@ -3390,10 +3560,10 @@
                       </a:endParaRPr>
                     </a:p>
                   </a:txBody>
-                  <a:tcPr marL="50800" marR="50800" marT="50800" marB="50800" anchor="ctr">
+                  <a:tcPr marL="76200" marR="76200" marT="76200" marB="76200" anchor="ctr">
                     <a:lnL w="12700" cap="flat" cmpd="sng" algn="ctr">
                       <a:solidFill>
-                        <a:srgbClr val="284963"/>
+                        <a:srgbClr val="264862"/>
                       </a:solidFill>
                       <a:prstDash val="solid"/>
                       <a:round/>
@@ -3402,7 +3572,7 @@
                     </a:lnL>
                     <a:lnR w="12700" cap="flat" cmpd="sng" algn="ctr">
                       <a:solidFill>
-                        <a:srgbClr val="284963"/>
+                        <a:srgbClr val="264862"/>
                       </a:solidFill>
                       <a:prstDash val="solid"/>
                       <a:round/>
@@ -3411,7 +3581,7 @@
                     </a:lnR>
                     <a:lnT w="12700" cap="flat" cmpd="sng" algn="ctr">
                       <a:solidFill>
-                        <a:srgbClr val="284963"/>
+                        <a:srgbClr val="264862"/>
                       </a:solidFill>
                       <a:prstDash val="solid"/>
                       <a:round/>
@@ -3420,7 +3590,7 @@
                     </a:lnT>
                     <a:lnB w="12700" cap="flat" cmpd="sng" algn="ctr">
                       <a:solidFill>
-                        <a:srgbClr val="284963"/>
+                        <a:srgbClr val="264862"/>
                       </a:solidFill>
                       <a:prstDash val="solid"/>
                       <a:round/>
@@ -3428,7 +3598,7 @@
                       <a:tailEnd type="none" w="med" len="med"/>
                     </a:lnB>
                     <a:solidFill>
-                      <a:srgbClr val="16314A"/>
+                      <a:srgbClr val="0F2133"/>
                     </a:solidFill>
                   </a:tcPr>
                 </a:tc>
@@ -3443,7 +3613,7 @@
                       <a:r>
                         <a:rPr lang="en-US" sz="1150" dirty="0">
                           <a:solidFill>
-                            <a:srgbClr val="E8EEF5"/>
+                            <a:srgbClr val="EAF1F8"/>
                           </a:solidFill>
                           <a:latin typeface="Calibri" pitchFamily="34" charset="0"/>
                           <a:ea typeface="Calibri" pitchFamily="34" charset="-122"/>
@@ -3458,10 +3628,10 @@
                       </a:endParaRPr>
                     </a:p>
                   </a:txBody>
-                  <a:tcPr marL="50800" marR="50800" marT="50800" marB="50800" anchor="ctr">
+                  <a:tcPr marL="76200" marR="76200" marT="76200" marB="76200" anchor="ctr">
                     <a:lnL w="12700" cap="flat" cmpd="sng" algn="ctr">
                       <a:solidFill>
-                        <a:srgbClr val="284963"/>
+                        <a:srgbClr val="264862"/>
                       </a:solidFill>
                       <a:prstDash val="solid"/>
                       <a:round/>
@@ -3470,7 +3640,7 @@
                     </a:lnL>
                     <a:lnR w="12700" cap="flat" cmpd="sng" algn="ctr">
                       <a:solidFill>
-                        <a:srgbClr val="284963"/>
+                        <a:srgbClr val="264862"/>
                       </a:solidFill>
                       <a:prstDash val="solid"/>
                       <a:round/>
@@ -3479,7 +3649,7 @@
                     </a:lnR>
                     <a:lnT w="12700" cap="flat" cmpd="sng" algn="ctr">
                       <a:solidFill>
-                        <a:srgbClr val="284963"/>
+                        <a:srgbClr val="264862"/>
                       </a:solidFill>
                       <a:prstDash val="solid"/>
                       <a:round/>
@@ -3488,7 +3658,7 @@
                     </a:lnT>
                     <a:lnB w="12700" cap="flat" cmpd="sng" algn="ctr">
                       <a:solidFill>
-                        <a:srgbClr val="284963"/>
+                        <a:srgbClr val="264862"/>
                       </a:solidFill>
                       <a:prstDash val="solid"/>
                       <a:round/>
@@ -3496,7 +3666,7 @@
                       <a:tailEnd type="none" w="med" len="med"/>
                     </a:lnB>
                     <a:solidFill>
-                      <a:srgbClr val="16314A"/>
+                      <a:srgbClr val="0F2133"/>
                     </a:solidFill>
                   </a:tcPr>
                 </a:tc>
@@ -3511,7 +3681,7 @@
                       <a:r>
                         <a:rPr lang="en-US" sz="1150" dirty="0">
                           <a:solidFill>
-                            <a:srgbClr val="E8EEF5"/>
+                            <a:srgbClr val="EAF1F8"/>
                           </a:solidFill>
                           <a:latin typeface="Calibri" pitchFamily="34" charset="0"/>
                           <a:ea typeface="Calibri" pitchFamily="34" charset="-122"/>
@@ -3526,10 +3696,10 @@
                       </a:endParaRPr>
                     </a:p>
                   </a:txBody>
-                  <a:tcPr marL="50800" marR="50800" marT="50800" marB="50800" anchor="ctr">
+                  <a:tcPr marL="76200" marR="76200" marT="76200" marB="76200" anchor="ctr">
                     <a:lnL w="12700" cap="flat" cmpd="sng" algn="ctr">
                       <a:solidFill>
-                        <a:srgbClr val="284963"/>
+                        <a:srgbClr val="264862"/>
                       </a:solidFill>
                       <a:prstDash val="solid"/>
                       <a:round/>
@@ -3538,7 +3708,7 @@
                     </a:lnL>
                     <a:lnR w="12700" cap="flat" cmpd="sng" algn="ctr">
                       <a:solidFill>
-                        <a:srgbClr val="284963"/>
+                        <a:srgbClr val="264862"/>
                       </a:solidFill>
                       <a:prstDash val="solid"/>
                       <a:round/>
@@ -3547,7 +3717,7 @@
                     </a:lnR>
                     <a:lnT w="12700" cap="flat" cmpd="sng" algn="ctr">
                       <a:solidFill>
-                        <a:srgbClr val="284963"/>
+                        <a:srgbClr val="264862"/>
                       </a:solidFill>
                       <a:prstDash val="solid"/>
                       <a:round/>
@@ -3556,7 +3726,7 @@
                     </a:lnT>
                     <a:lnB w="12700" cap="flat" cmpd="sng" algn="ctr">
                       <a:solidFill>
-                        <a:srgbClr val="284963"/>
+                        <a:srgbClr val="264862"/>
                       </a:solidFill>
                       <a:prstDash val="solid"/>
                       <a:round/>
@@ -3564,7 +3734,7 @@
                       <a:tailEnd type="none" w="med" len="med"/>
                     </a:lnB>
                     <a:solidFill>
-                      <a:srgbClr val="16314A"/>
+                      <a:srgbClr val="0F2133"/>
                     </a:solidFill>
                   </a:tcPr>
                 </a:tc>
@@ -3587,7 +3757,7 @@
     <p:bg>
       <p:bgPr>
         <a:solidFill>
-          <a:srgbClr val="0B1B2B"/>
+          <a:srgbClr val="0A1622"/>
         </a:solidFill>
       </p:bgPr>
     </p:bg>
@@ -3625,6 +3795,13 @@
             <a:srgbClr val="22D3EE"/>
           </a:solidFill>
           <a:ln/>
+          <a:effectLst>
+            <a:outerShdw sx="100000" sy="100000" kx="0" ky="0" algn="bl" rotWithShape="0" blurRad="50800" dist="25400" dir="5400000">
+              <a:srgbClr val="000000">
+                <a:alpha val="40000"/>
+              </a:srgbClr>
+            </a:outerShdw>
+          </a:effectLst>
         </p:spPr>
       </p:sp>
       <p:sp>
@@ -3654,7 +3831,7 @@
             <a:r>
               <a:rPr lang="en-US" sz="2200" b="1" dirty="0">
                 <a:solidFill>
-                  <a:srgbClr val="0B1B2B"/>
+                  <a:srgbClr val="0A1622"/>
                 </a:solidFill>
                 <a:latin typeface="Consolas" pitchFamily="34" charset="0"/>
                 <a:ea typeface="Consolas" pitchFamily="34" charset="-122"/>
@@ -3746,7 +3923,27 @@
       </p:sp>
       <p:sp>
         <p:nvSpPr>
-          <p:cNvPr id="6" name="Text 4"/>
+          <p:cNvPr id="6" name="Shape 4"/>
+          <p:cNvSpPr/>
+          <p:nvPr/>
+        </p:nvSpPr>
+        <p:spPr>
+          <a:xfrm>
+            <a:off x="1298448" y="1316736"/>
+            <a:ext cx="1005840" cy="32004"/>
+          </a:xfrm>
+          <a:prstGeom prst="rect">
+            <a:avLst/>
+          </a:prstGeom>
+          <a:solidFill>
+            <a:srgbClr val="22D3EE"/>
+          </a:solidFill>
+          <a:ln/>
+        </p:spPr>
+      </p:sp>
+      <p:sp>
+        <p:nvSpPr>
+          <p:cNvPr id="7" name="Text 5"/>
           <p:cNvSpPr/>
           <p:nvPr/>
         </p:nvSpPr>
@@ -3775,7 +3972,7 @@
             <a:r>
               <a:rPr lang="en-US" sz="1600" b="1" dirty="0">
                 <a:solidFill>
-                  <a:srgbClr val="E8EEF5"/>
+                  <a:srgbClr val="EAF1F8"/>
                 </a:solidFill>
                 <a:latin typeface="Calibri" pitchFamily="34" charset="0"/>
                 <a:ea typeface="Calibri" pitchFamily="34" charset="-122"/>
@@ -3796,7 +3993,7 @@
             <a:r>
               <a:rPr lang="en-US" sz="1600" b="1" dirty="0">
                 <a:solidFill>
-                  <a:srgbClr val="E8EEF5"/>
+                  <a:srgbClr val="EAF1F8"/>
                 </a:solidFill>
                 <a:latin typeface="Calibri" pitchFamily="34" charset="0"/>
                 <a:ea typeface="Calibri" pitchFamily="34" charset="-122"/>
@@ -3817,7 +4014,7 @@
             <a:r>
               <a:rPr lang="en-US" sz="1600" b="1" dirty="0">
                 <a:solidFill>
-                  <a:srgbClr val="E8EEF5"/>
+                  <a:srgbClr val="EAF1F8"/>
                 </a:solidFill>
                 <a:latin typeface="Calibri" pitchFamily="34" charset="0"/>
                 <a:ea typeface="Calibri" pitchFamily="34" charset="-122"/>
@@ -3838,7 +4035,7 @@
             <a:r>
               <a:rPr lang="en-US" sz="1600" b="1" dirty="0">
                 <a:solidFill>
-                  <a:srgbClr val="E8EEF5"/>
+                  <a:srgbClr val="EAF1F8"/>
                 </a:solidFill>
                 <a:latin typeface="Calibri" pitchFamily="34" charset="0"/>
                 <a:ea typeface="Calibri" pitchFamily="34" charset="-122"/>
@@ -3864,7 +4061,7 @@
     <p:bg>
       <p:bgPr>
         <a:solidFill>
-          <a:srgbClr val="0B1B2B"/>
+          <a:srgbClr val="0A1622"/>
         </a:solidFill>
       </p:bgPr>
     </p:bg>
@@ -3987,7 +4184,7 @@
             <a:r>
               <a:rPr lang="en-US" sz="1600" dirty="0">
                 <a:solidFill>
-                  <a:srgbClr val="A8B4C4"/>
+                  <a:srgbClr val="9FB0C2"/>
                 </a:solidFill>
                 <a:latin typeface="Calibri" pitchFamily="34" charset="0"/>
                 <a:ea typeface="Calibri" pitchFamily="34" charset="-122"/>
@@ -4013,7 +4210,7 @@
     <p:bg>
       <p:bgPr>
         <a:solidFill>
-          <a:srgbClr val="0B1B2B"/>
+          <a:srgbClr val="0A1622"/>
         </a:solidFill>
       </p:bgPr>
     </p:bg>
@@ -4051,6 +4248,13 @@
             <a:srgbClr val="22D3EE"/>
           </a:solidFill>
           <a:ln/>
+          <a:effectLst>
+            <a:outerShdw sx="100000" sy="100000" kx="0" ky="0" algn="bl" rotWithShape="0" blurRad="50800" dist="25400" dir="5400000">
+              <a:srgbClr val="000000">
+                <a:alpha val="40000"/>
+              </a:srgbClr>
+            </a:outerShdw>
+          </a:effectLst>
         </p:spPr>
       </p:sp>
       <p:sp>
@@ -4080,7 +4284,7 @@
             <a:r>
               <a:rPr lang="en-US" sz="2200" b="1" dirty="0">
                 <a:solidFill>
-                  <a:srgbClr val="0B1B2B"/>
+                  <a:srgbClr val="0A1622"/>
                 </a:solidFill>
                 <a:latin typeface="Consolas" pitchFamily="34" charset="0"/>
                 <a:ea typeface="Consolas" pitchFamily="34" charset="-122"/>
@@ -4172,7 +4376,27 @@
       </p:sp>
       <p:sp>
         <p:nvSpPr>
-          <p:cNvPr id="6" name="Text 4"/>
+          <p:cNvPr id="6" name="Shape 4"/>
+          <p:cNvSpPr/>
+          <p:nvPr/>
+        </p:nvSpPr>
+        <p:spPr>
+          <a:xfrm>
+            <a:off x="1298448" y="1316736"/>
+            <a:ext cx="1005840" cy="32004"/>
+          </a:xfrm>
+          <a:prstGeom prst="rect">
+            <a:avLst/>
+          </a:prstGeom>
+          <a:solidFill>
+            <a:srgbClr val="22D3EE"/>
+          </a:solidFill>
+          <a:ln/>
+        </p:spPr>
+      </p:sp>
+      <p:sp>
+        <p:nvSpPr>
+          <p:cNvPr id="7" name="Text 5"/>
           <p:cNvSpPr/>
           <p:nvPr/>
         </p:nvSpPr>
@@ -4222,7 +4446,7 @@
             <a:r>
               <a:rPr lang="en-US" sz="1600" dirty="0">
                 <a:solidFill>
-                  <a:srgbClr val="E8EEF5"/>
+                  <a:srgbClr val="EAF1F8"/>
                 </a:solidFill>
                 <a:latin typeface="Calibri" pitchFamily="34" charset="0"/>
                 <a:ea typeface="Calibri" pitchFamily="34" charset="-122"/>
@@ -4243,7 +4467,7 @@
             <a:r>
               <a:rPr lang="en-US" sz="1600" dirty="0">
                 <a:solidFill>
-                  <a:srgbClr val="E8EEF5"/>
+                  <a:srgbClr val="EAF1F8"/>
                 </a:solidFill>
                 <a:latin typeface="Calibri" pitchFamily="34" charset="0"/>
                 <a:ea typeface="Calibri" pitchFamily="34" charset="-122"/>
@@ -4264,7 +4488,7 @@
             <a:r>
               <a:rPr lang="en-US" sz="1600" dirty="0">
                 <a:solidFill>
-                  <a:srgbClr val="E8EEF5"/>
+                  <a:srgbClr val="EAF1F8"/>
                 </a:solidFill>
                 <a:latin typeface="Calibri" pitchFamily="34" charset="0"/>
                 <a:ea typeface="Calibri" pitchFamily="34" charset="-122"/>
@@ -4290,7 +4514,7 @@
     <p:bg>
       <p:bgPr>
         <a:solidFill>
-          <a:srgbClr val="0B1B2B"/>
+          <a:srgbClr val="0A1622"/>
         </a:solidFill>
       </p:bgPr>
     </p:bg>
@@ -4328,6 +4552,13 @@
             <a:srgbClr val="22D3EE"/>
           </a:solidFill>
           <a:ln/>
+          <a:effectLst>
+            <a:outerShdw sx="100000" sy="100000" kx="0" ky="0" algn="bl" rotWithShape="0" blurRad="50800" dist="25400" dir="5400000">
+              <a:srgbClr val="000000">
+                <a:alpha val="40000"/>
+              </a:srgbClr>
+            </a:outerShdw>
+          </a:effectLst>
         </p:spPr>
       </p:sp>
       <p:sp>
@@ -4357,7 +4588,7 @@
             <a:r>
               <a:rPr lang="en-US" sz="2200" b="1" dirty="0">
                 <a:solidFill>
-                  <a:srgbClr val="0B1B2B"/>
+                  <a:srgbClr val="0A1622"/>
                 </a:solidFill>
                 <a:latin typeface="Consolas" pitchFamily="34" charset="0"/>
                 <a:ea typeface="Consolas" pitchFamily="34" charset="-122"/>
@@ -4449,7 +4680,27 @@
       </p:sp>
       <p:sp>
         <p:nvSpPr>
-          <p:cNvPr id="6" name="Text 4"/>
+          <p:cNvPr id="6" name="Shape 4"/>
+          <p:cNvSpPr/>
+          <p:nvPr/>
+        </p:nvSpPr>
+        <p:spPr>
+          <a:xfrm>
+            <a:off x="1298448" y="1316736"/>
+            <a:ext cx="1005840" cy="32004"/>
+          </a:xfrm>
+          <a:prstGeom prst="rect">
+            <a:avLst/>
+          </a:prstGeom>
+          <a:solidFill>
+            <a:srgbClr val="22D3EE"/>
+          </a:solidFill>
+          <a:ln/>
+        </p:spPr>
+      </p:sp>
+      <p:sp>
+        <p:nvSpPr>
+          <p:cNvPr id="7" name="Text 5"/>
           <p:cNvSpPr/>
           <p:nvPr/>
         </p:nvSpPr>
@@ -4478,7 +4729,7 @@
             <a:r>
               <a:rPr lang="en-US" sz="1600" b="1" dirty="0">
                 <a:solidFill>
-                  <a:srgbClr val="E8EEF5"/>
+                  <a:srgbClr val="EAF1F8"/>
                 </a:solidFill>
                 <a:latin typeface="Calibri" pitchFamily="34" charset="0"/>
                 <a:ea typeface="Calibri" pitchFamily="34" charset="-122"/>
@@ -4499,7 +4750,7 @@
             <a:r>
               <a:rPr lang="en-US" sz="1600" dirty="0">
                 <a:solidFill>
-                  <a:srgbClr val="E8EEF5"/>
+                  <a:srgbClr val="EAF1F8"/>
                 </a:solidFill>
                 <a:latin typeface="Calibri" pitchFamily="34" charset="0"/>
                 <a:ea typeface="Calibri" pitchFamily="34" charset="-122"/>
@@ -4520,7 +4771,7 @@
             <a:r>
               <a:rPr lang="en-US" sz="1600" dirty="0">
                 <a:solidFill>
-                  <a:srgbClr val="E8EEF5"/>
+                  <a:srgbClr val="EAF1F8"/>
                 </a:solidFill>
                 <a:latin typeface="Calibri" pitchFamily="34" charset="0"/>
                 <a:ea typeface="Calibri" pitchFamily="34" charset="-122"/>
@@ -4534,7 +4785,7 @@
       </p:sp>
       <p:sp>
         <p:nvSpPr>
-          <p:cNvPr id="7" name="Shape 5"/>
+          <p:cNvPr id="8" name="Shape 6"/>
           <p:cNvSpPr/>
           <p:nvPr/>
         </p:nvSpPr>
@@ -4543,30 +4794,119 @@
             <a:off x="548640" y="3017520"/>
             <a:ext cx="8046720" cy="1371600"/>
           </a:xfrm>
-          <a:prstGeom prst="rect">
-            <a:avLst/>
+          <a:prstGeom prst="roundRect">
+            <a:avLst>
+              <a:gd name="adj" fmla="val 2333"/>
+            </a:avLst>
           </a:prstGeom>
           <a:solidFill>
-            <a:srgbClr val="081320"/>
+            <a:srgbClr val="060F1A"/>
           </a:solidFill>
           <a:ln w="12700">
             <a:solidFill>
-              <a:srgbClr val="284963"/>
+              <a:srgbClr val="264862"/>
             </a:solidFill>
             <a:prstDash val="solid"/>
           </a:ln>
-        </p:spPr>
-      </p:sp>
-      <p:sp>
-        <p:nvSpPr>
-          <p:cNvPr id="8" name="Text 6"/>
-          <p:cNvSpPr/>
-          <p:nvPr/>
-        </p:nvSpPr>
-        <p:spPr>
-          <a:xfrm>
-            <a:off x="749808" y="3145536"/>
-            <a:ext cx="7644384" cy="1115568"/>
+          <a:effectLst>
+            <a:outerShdw sx="100000" sy="100000" kx="0" ky="0" algn="bl" rotWithShape="0" blurRad="88900" dist="38100" dir="5400000">
+              <a:srgbClr val="000000">
+                <a:alpha val="50000"/>
+              </a:srgbClr>
+            </a:outerShdw>
+          </a:effectLst>
+        </p:spPr>
+      </p:sp>
+      <p:sp>
+        <p:nvSpPr>
+          <p:cNvPr id="9" name="Shape 7"/>
+          <p:cNvSpPr/>
+          <p:nvPr/>
+        </p:nvSpPr>
+        <p:spPr>
+          <a:xfrm>
+            <a:off x="566928" y="3054096"/>
+            <a:ext cx="8010144" cy="274320"/>
+          </a:xfrm>
+          <a:prstGeom prst="rect">
+            <a:avLst/>
+          </a:prstGeom>
+          <a:solidFill>
+            <a:srgbClr val="13283C"/>
+          </a:solidFill>
+          <a:ln/>
+        </p:spPr>
+      </p:sp>
+      <p:sp>
+        <p:nvSpPr>
+          <p:cNvPr id="10" name="Shape 8"/>
+          <p:cNvSpPr/>
+          <p:nvPr/>
+        </p:nvSpPr>
+        <p:spPr>
+          <a:xfrm>
+            <a:off x="713232" y="3127248"/>
+            <a:ext cx="118872" cy="118872"/>
+          </a:xfrm>
+          <a:prstGeom prst="ellipse">
+            <a:avLst/>
+          </a:prstGeom>
+          <a:solidFill>
+            <a:srgbClr val="FB7185"/>
+          </a:solidFill>
+          <a:ln/>
+        </p:spPr>
+      </p:sp>
+      <p:sp>
+        <p:nvSpPr>
+          <p:cNvPr id="11" name="Shape 9"/>
+          <p:cNvSpPr/>
+          <p:nvPr/>
+        </p:nvSpPr>
+        <p:spPr>
+          <a:xfrm>
+            <a:off x="886968" y="3127248"/>
+            <a:ext cx="118872" cy="118872"/>
+          </a:xfrm>
+          <a:prstGeom prst="ellipse">
+            <a:avLst/>
+          </a:prstGeom>
+          <a:solidFill>
+            <a:srgbClr val="FBBF24"/>
+          </a:solidFill>
+          <a:ln/>
+        </p:spPr>
+      </p:sp>
+      <p:sp>
+        <p:nvSpPr>
+          <p:cNvPr id="12" name="Shape 10"/>
+          <p:cNvSpPr/>
+          <p:nvPr/>
+        </p:nvSpPr>
+        <p:spPr>
+          <a:xfrm>
+            <a:off x="1060704" y="3127248"/>
+            <a:ext cx="118872" cy="118872"/>
+          </a:xfrm>
+          <a:prstGeom prst="ellipse">
+            <a:avLst/>
+          </a:prstGeom>
+          <a:solidFill>
+            <a:srgbClr val="34D399"/>
+          </a:solidFill>
+          <a:ln/>
+        </p:spPr>
+      </p:sp>
+      <p:sp>
+        <p:nvSpPr>
+          <p:cNvPr id="13" name="Text 11"/>
+          <p:cNvSpPr/>
+          <p:nvPr/>
+        </p:nvSpPr>
+        <p:spPr>
+          <a:xfrm>
+            <a:off x="768096" y="3438144"/>
+            <a:ext cx="7626096" cy="822960"/>
           </a:xfrm>
           <a:prstGeom prst="rect">
             <a:avLst/>
@@ -4644,7 +4984,7 @@
     <p:bg>
       <p:bgPr>
         <a:solidFill>
-          <a:srgbClr val="0B1B2B"/>
+          <a:srgbClr val="0A1622"/>
         </a:solidFill>
       </p:bgPr>
     </p:bg>
@@ -4682,6 +5022,13 @@
             <a:srgbClr val="22D3EE"/>
           </a:solidFill>
           <a:ln/>
+          <a:effectLst>
+            <a:outerShdw sx="100000" sy="100000" kx="0" ky="0" algn="bl" rotWithShape="0" blurRad="50800" dist="25400" dir="5400000">
+              <a:srgbClr val="000000">
+                <a:alpha val="40000"/>
+              </a:srgbClr>
+            </a:outerShdw>
+          </a:effectLst>
         </p:spPr>
       </p:sp>
       <p:sp>
@@ -4711,7 +5058,7 @@
             <a:r>
               <a:rPr lang="en-US" sz="2200" b="1" dirty="0">
                 <a:solidFill>
-                  <a:srgbClr val="0B1B2B"/>
+                  <a:srgbClr val="0A1622"/>
                 </a:solidFill>
                 <a:latin typeface="Consolas" pitchFamily="34" charset="0"/>
                 <a:ea typeface="Consolas" pitchFamily="34" charset="-122"/>
@@ -4804,6 +5151,26 @@
       <p:sp>
         <p:nvSpPr>
           <p:cNvPr id="6" name="Shape 4"/>
+          <p:cNvSpPr/>
+          <p:nvPr/>
+        </p:nvSpPr>
+        <p:spPr>
+          <a:xfrm>
+            <a:off x="1298448" y="1316736"/>
+            <a:ext cx="1005840" cy="32004"/>
+          </a:xfrm>
+          <a:prstGeom prst="rect">
+            <a:avLst/>
+          </a:prstGeom>
+          <a:solidFill>
+            <a:srgbClr val="22D3EE"/>
+          </a:solidFill>
+          <a:ln/>
+        </p:spPr>
+      </p:sp>
+      <p:sp>
+        <p:nvSpPr>
+          <p:cNvPr id="7" name="Shape 5"/>
           <p:cNvSpPr/>
           <p:nvPr/>
         </p:nvSpPr>
@@ -4818,7 +5185,7 @@
             </a:avLst>
           </a:prstGeom>
           <a:solidFill>
-            <a:srgbClr val="12293D"/>
+            <a:srgbClr val="13283C"/>
           </a:solidFill>
           <a:ln w="19050">
             <a:solidFill>
@@ -4830,7 +5197,7 @@
       </p:sp>
       <p:sp>
         <p:nvSpPr>
-          <p:cNvPr id="7" name="Text 5"/>
+          <p:cNvPr id="8" name="Text 6"/>
           <p:cNvSpPr/>
           <p:nvPr/>
         </p:nvSpPr>
@@ -4886,7 +5253,7 @@
       </p:sp>
       <p:sp>
         <p:nvSpPr>
-          <p:cNvPr id="8" name="Shape 6"/>
+          <p:cNvPr id="9" name="Shape 7"/>
           <p:cNvSpPr/>
           <p:nvPr/>
         </p:nvSpPr>
@@ -4910,7 +5277,7 @@
       </p:sp>
       <p:sp>
         <p:nvSpPr>
-          <p:cNvPr id="9" name="Text 7"/>
+          <p:cNvPr id="10" name="Text 8"/>
           <p:cNvSpPr/>
           <p:nvPr/>
         </p:nvSpPr>
@@ -4935,7 +5302,7 @@
             <a:r>
               <a:rPr lang="en-US" sz="1000" dirty="0">
                 <a:solidFill>
-                  <a:srgbClr val="A8B4C4"/>
+                  <a:srgbClr val="9FB0C2"/>
                 </a:solidFill>
                 <a:latin typeface="Consolas" pitchFamily="34" charset="0"/>
                 <a:ea typeface="Consolas" pitchFamily="34" charset="-122"/>
@@ -4952,7 +5319,7 @@
             <a:r>
               <a:rPr lang="en-US" sz="1000" dirty="0">
                 <a:solidFill>
-                  <a:srgbClr val="A8B4C4"/>
+                  <a:srgbClr val="9FB0C2"/>
                 </a:solidFill>
                 <a:latin typeface="Consolas" pitchFamily="34" charset="0"/>
                 <a:ea typeface="Consolas" pitchFamily="34" charset="-122"/>
@@ -4966,7 +5333,7 @@
       </p:sp>
       <p:sp>
         <p:nvSpPr>
-          <p:cNvPr id="10" name="Shape 8"/>
+          <p:cNvPr id="11" name="Shape 9"/>
           <p:cNvSpPr/>
           <p:nvPr/>
         </p:nvSpPr>
@@ -4981,7 +5348,7 @@
             </a:avLst>
           </a:prstGeom>
           <a:solidFill>
-            <a:srgbClr val="12293D"/>
+            <a:srgbClr val="13283C"/>
           </a:solidFill>
           <a:ln w="19050">
             <a:solidFill>
@@ -4993,7 +5360,7 @@
       </p:sp>
       <p:sp>
         <p:nvSpPr>
-          <p:cNvPr id="11" name="Text 9"/>
+          <p:cNvPr id="12" name="Text 10"/>
           <p:cNvSpPr/>
           <p:nvPr/>
         </p:nvSpPr>
@@ -5049,7 +5416,7 @@
       </p:sp>
       <p:sp>
         <p:nvSpPr>
-          <p:cNvPr id="12" name="Shape 10"/>
+          <p:cNvPr id="13" name="Shape 11"/>
           <p:cNvSpPr/>
           <p:nvPr/>
         </p:nvSpPr>
@@ -5064,11 +5431,11 @@
             </a:avLst>
           </a:prstGeom>
           <a:solidFill>
-            <a:srgbClr val="081320"/>
+            <a:srgbClr val="060F1A"/>
           </a:solidFill>
           <a:ln w="12700">
             <a:solidFill>
-              <a:srgbClr val="284963"/>
+              <a:srgbClr val="264862"/>
             </a:solidFill>
             <a:prstDash val="solid"/>
           </a:ln>
@@ -5076,7 +5443,7 @@
       </p:sp>
       <p:sp>
         <p:nvSpPr>
-          <p:cNvPr id="13" name="Text 11"/>
+          <p:cNvPr id="14" name="Text 12"/>
           <p:cNvSpPr/>
           <p:nvPr/>
         </p:nvSpPr>
@@ -5115,7 +5482,7 @@
       </p:sp>
       <p:sp>
         <p:nvSpPr>
-          <p:cNvPr id="14" name="Text 12"/>
+          <p:cNvPr id="15" name="Text 13"/>
           <p:cNvSpPr/>
           <p:nvPr/>
         </p:nvSpPr>
@@ -5144,7 +5511,7 @@
             <a:r>
               <a:rPr lang="en-US" sz="1400" dirty="0">
                 <a:solidFill>
-                  <a:srgbClr val="E8EEF5"/>
+                  <a:srgbClr val="EAF1F8"/>
                 </a:solidFill>
                 <a:latin typeface="Calibri" pitchFamily="34" charset="0"/>
                 <a:ea typeface="Calibri" pitchFamily="34" charset="-122"/>
@@ -5170,7 +5537,7 @@
     <p:bg>
       <p:bgPr>
         <a:solidFill>
-          <a:srgbClr val="0B1B2B"/>
+          <a:srgbClr val="0A1622"/>
         </a:solidFill>
       </p:bgPr>
     </p:bg>
@@ -5208,6 +5575,13 @@
             <a:srgbClr val="22D3EE"/>
           </a:solidFill>
           <a:ln/>
+          <a:effectLst>
+            <a:outerShdw sx="100000" sy="100000" kx="0" ky="0" algn="bl" rotWithShape="0" blurRad="50800" dist="25400" dir="5400000">
+              <a:srgbClr val="000000">
+                <a:alpha val="40000"/>
+              </a:srgbClr>
+            </a:outerShdw>
+          </a:effectLst>
         </p:spPr>
       </p:sp>
       <p:sp>
@@ -5237,7 +5611,7 @@
             <a:r>
               <a:rPr lang="en-US" sz="2200" b="1" dirty="0">
                 <a:solidFill>
-                  <a:srgbClr val="0B1B2B"/>
+                  <a:srgbClr val="0A1622"/>
                 </a:solidFill>
                 <a:latin typeface="Consolas" pitchFamily="34" charset="0"/>
                 <a:ea typeface="Consolas" pitchFamily="34" charset="-122"/>
@@ -5329,7 +5703,27 @@
       </p:sp>
       <p:sp>
         <p:nvSpPr>
-          <p:cNvPr id="6" name="Text 4"/>
+          <p:cNvPr id="6" name="Shape 4"/>
+          <p:cNvSpPr/>
+          <p:nvPr/>
+        </p:nvSpPr>
+        <p:spPr>
+          <a:xfrm>
+            <a:off x="1298448" y="1316736"/>
+            <a:ext cx="1005840" cy="32004"/>
+          </a:xfrm>
+          <a:prstGeom prst="rect">
+            <a:avLst/>
+          </a:prstGeom>
+          <a:solidFill>
+            <a:srgbClr val="22D3EE"/>
+          </a:solidFill>
+          <a:ln/>
+        </p:spPr>
+      </p:sp>
+      <p:sp>
+        <p:nvSpPr>
+          <p:cNvPr id="7" name="Text 5"/>
           <p:cNvSpPr/>
           <p:nvPr/>
         </p:nvSpPr>
@@ -5400,7 +5794,7 @@
             <a:r>
               <a:rPr lang="en-US" sz="1600" dirty="0">
                 <a:solidFill>
-                  <a:srgbClr val="E8EEF5"/>
+                  <a:srgbClr val="EAF1F8"/>
                 </a:solidFill>
                 <a:latin typeface="Calibri" pitchFamily="34" charset="0"/>
                 <a:ea typeface="Calibri" pitchFamily="34" charset="-122"/>
@@ -5421,7 +5815,7 @@
             <a:r>
               <a:rPr lang="en-US" sz="1600" dirty="0">
                 <a:solidFill>
-                  <a:srgbClr val="E8EEF5"/>
+                  <a:srgbClr val="EAF1F8"/>
                 </a:solidFill>
                 <a:latin typeface="Calibri" pitchFamily="34" charset="0"/>
                 <a:ea typeface="Calibri" pitchFamily="34" charset="-122"/>
@@ -5447,7 +5841,7 @@
     <p:bg>
       <p:bgPr>
         <a:solidFill>
-          <a:srgbClr val="0B1B2B"/>
+          <a:srgbClr val="0A1622"/>
         </a:solidFill>
       </p:bgPr>
     </p:bg>
@@ -5485,6 +5879,13 @@
             <a:srgbClr val="22D3EE"/>
           </a:solidFill>
           <a:ln/>
+          <a:effectLst>
+            <a:outerShdw sx="100000" sy="100000" kx="0" ky="0" algn="bl" rotWithShape="0" blurRad="50800" dist="25400" dir="5400000">
+              <a:srgbClr val="000000">
+                <a:alpha val="40000"/>
+              </a:srgbClr>
+            </a:outerShdw>
+          </a:effectLst>
         </p:spPr>
       </p:sp>
       <p:sp>
@@ -5514,7 +5915,7 @@
             <a:r>
               <a:rPr lang="en-US" sz="2200" b="1" dirty="0">
                 <a:solidFill>
-                  <a:srgbClr val="0B1B2B"/>
+                  <a:srgbClr val="0A1622"/>
                 </a:solidFill>
                 <a:latin typeface="Consolas" pitchFamily="34" charset="0"/>
                 <a:ea typeface="Consolas" pitchFamily="34" charset="-122"/>
@@ -5612,16 +6013,36 @@
         </p:nvSpPr>
         <p:spPr>
           <a:xfrm>
+            <a:off x="1298448" y="1316736"/>
+            <a:ext cx="1005840" cy="32004"/>
+          </a:xfrm>
+          <a:prstGeom prst="rect">
+            <a:avLst/>
+          </a:prstGeom>
+          <a:solidFill>
+            <a:srgbClr val="22D3EE"/>
+          </a:solidFill>
+          <a:ln/>
+        </p:spPr>
+      </p:sp>
+      <p:sp>
+        <p:nvSpPr>
+          <p:cNvPr id="7" name="Shape 5"/>
+          <p:cNvSpPr/>
+          <p:nvPr/>
+        </p:nvSpPr>
+        <p:spPr>
+          <a:xfrm>
             <a:off x="548640" y="1920240"/>
-            <a:ext cx="1234440" cy="777240"/>
+            <a:ext cx="1219200" cy="822960"/>
           </a:xfrm>
           <a:prstGeom prst="roundRect">
             <a:avLst>
-              <a:gd name="adj" fmla="val 8235"/>
+              <a:gd name="adj" fmla="val 8889"/>
             </a:avLst>
           </a:prstGeom>
           <a:solidFill>
-            <a:srgbClr val="12293D"/>
+            <a:srgbClr val="13283C"/>
           </a:solidFill>
           <a:ln w="15875">
             <a:solidFill>
@@ -5629,18 +6050,45 @@
             </a:solidFill>
             <a:prstDash val="solid"/>
           </a:ln>
-        </p:spPr>
-      </p:sp>
-      <p:sp>
-        <p:nvSpPr>
-          <p:cNvPr id="7" name="Text 5"/>
-          <p:cNvSpPr/>
-          <p:nvPr/>
-        </p:nvSpPr>
-        <p:spPr>
-          <a:xfrm>
-            <a:off x="585216" y="1920240"/>
-            <a:ext cx="1161288" cy="777240"/>
+          <a:effectLst>
+            <a:outerShdw sx="100000" sy="100000" kx="0" ky="0" algn="bl" rotWithShape="0" blurRad="50800" dist="25400" dir="5400000">
+              <a:srgbClr val="000000">
+                <a:alpha val="40000"/>
+              </a:srgbClr>
+            </a:outerShdw>
+          </a:effectLst>
+        </p:spPr>
+      </p:sp>
+      <p:sp>
+        <p:nvSpPr>
+          <p:cNvPr id="8" name="Shape 6"/>
+          <p:cNvSpPr/>
+          <p:nvPr/>
+        </p:nvSpPr>
+        <p:spPr>
+          <a:xfrm>
+            <a:off x="658368" y="2066544"/>
+            <a:ext cx="999744" cy="27432"/>
+          </a:xfrm>
+          <a:prstGeom prst="rect">
+            <a:avLst/>
+          </a:prstGeom>
+          <a:solidFill>
+            <a:srgbClr val="22D3EE"/>
+          </a:solidFill>
+          <a:ln/>
+        </p:spPr>
+      </p:sp>
+      <p:sp>
+        <p:nvSpPr>
+          <p:cNvPr id="9" name="Text 7"/>
+          <p:cNvSpPr/>
+          <p:nvPr/>
+        </p:nvSpPr>
+        <p:spPr>
+          <a:xfrm>
+            <a:off x="585216" y="2029968"/>
+            <a:ext cx="1146048" cy="713232"/>
           </a:xfrm>
           <a:prstGeom prst="rect">
             <a:avLst/>
@@ -5658,7 +6106,7 @@
             <a:r>
               <a:rPr lang="en-US" sz="1150" b="1" dirty="0">
                 <a:solidFill>
-                  <a:srgbClr val="E8EEF5"/>
+                  <a:srgbClr val="EAF1F8"/>
                 </a:solidFill>
                 <a:latin typeface="Calibri" pitchFamily="34" charset="0"/>
                 <a:ea typeface="Calibri" pitchFamily="34" charset="-122"/>
@@ -5672,22 +6120,61 @@
       </p:sp>
       <p:sp>
         <p:nvSpPr>
-          <p:cNvPr id="8" name="Shape 6"/>
-          <p:cNvSpPr/>
-          <p:nvPr/>
-        </p:nvSpPr>
-        <p:spPr>
-          <a:xfrm>
-            <a:off x="1929384" y="1920240"/>
-            <a:ext cx="1234440" cy="777240"/>
+          <p:cNvPr id="10" name="Text 8"/>
+          <p:cNvSpPr/>
+          <p:nvPr/>
+        </p:nvSpPr>
+        <p:spPr>
+          <a:xfrm>
+            <a:off x="1731264" y="1920240"/>
+            <a:ext cx="237744" cy="822960"/>
+          </a:xfrm>
+          <a:prstGeom prst="rect">
+            <a:avLst/>
+          </a:prstGeom>
+          <a:noFill/>
+          <a:ln/>
+        </p:spPr>
+        <p:txBody>
+          <a:bodyPr wrap="square" lIns="0" tIns="0" rIns="0" bIns="0" rtlCol="0" anchor="ctr"/>
+          <a:lstStyle/>
+          <a:p>
+            <a:pPr algn="ctr" indent="0" marL="0">
+              <a:buNone/>
+            </a:pPr>
+            <a:r>
+              <a:rPr lang="en-US" sz="1800" b="1" dirty="0">
+                <a:solidFill>
+                  <a:srgbClr val="22D3EE"/>
+                </a:solidFill>
+                <a:latin typeface="Trebuchet MS" pitchFamily="34" charset="0"/>
+                <a:ea typeface="Trebuchet MS" pitchFamily="34" charset="-122"/>
+                <a:cs typeface="Trebuchet MS" pitchFamily="34" charset="-120"/>
+              </a:rPr>
+              <a:t>›</a:t>
+            </a:r>
+            <a:endParaRPr lang="en-US" sz="1800" dirty="0"/>
+          </a:p>
+        </p:txBody>
+      </p:sp>
+      <p:sp>
+        <p:nvSpPr>
+          <p:cNvPr id="11" name="Shape 9"/>
+          <p:cNvSpPr/>
+          <p:nvPr/>
+        </p:nvSpPr>
+        <p:spPr>
+          <a:xfrm>
+            <a:off x="1932432" y="1920240"/>
+            <a:ext cx="1219200" cy="822960"/>
           </a:xfrm>
           <a:prstGeom prst="roundRect">
             <a:avLst>
-              <a:gd name="adj" fmla="val 8235"/>
+              <a:gd name="adj" fmla="val 8889"/>
             </a:avLst>
           </a:prstGeom>
           <a:solidFill>
-            <a:srgbClr val="12293D"/>
+            <a:srgbClr val="13283C"/>
           </a:solidFill>
           <a:ln w="15875">
             <a:solidFill>
@@ -5695,18 +6182,45 @@
             </a:solidFill>
             <a:prstDash val="solid"/>
           </a:ln>
-        </p:spPr>
-      </p:sp>
-      <p:sp>
-        <p:nvSpPr>
-          <p:cNvPr id="9" name="Text 7"/>
-          <p:cNvSpPr/>
-          <p:nvPr/>
-        </p:nvSpPr>
-        <p:spPr>
-          <a:xfrm>
-            <a:off x="1965960" y="1920240"/>
-            <a:ext cx="1161288" cy="777240"/>
+          <a:effectLst>
+            <a:outerShdw sx="100000" sy="100000" kx="0" ky="0" algn="bl" rotWithShape="0" blurRad="50800" dist="25400" dir="5400000">
+              <a:srgbClr val="000000">
+                <a:alpha val="40000"/>
+              </a:srgbClr>
+            </a:outerShdw>
+          </a:effectLst>
+        </p:spPr>
+      </p:sp>
+      <p:sp>
+        <p:nvSpPr>
+          <p:cNvPr id="12" name="Shape 10"/>
+          <p:cNvSpPr/>
+          <p:nvPr/>
+        </p:nvSpPr>
+        <p:spPr>
+          <a:xfrm>
+            <a:off x="2042160" y="2066544"/>
+            <a:ext cx="999744" cy="27432"/>
+          </a:xfrm>
+          <a:prstGeom prst="rect">
+            <a:avLst/>
+          </a:prstGeom>
+          <a:solidFill>
+            <a:srgbClr val="22D3EE"/>
+          </a:solidFill>
+          <a:ln/>
+        </p:spPr>
+      </p:sp>
+      <p:sp>
+        <p:nvSpPr>
+          <p:cNvPr id="13" name="Text 11"/>
+          <p:cNvSpPr/>
+          <p:nvPr/>
+        </p:nvSpPr>
+        <p:spPr>
+          <a:xfrm>
+            <a:off x="1969008" y="2029968"/>
+            <a:ext cx="1146048" cy="713232"/>
           </a:xfrm>
           <a:prstGeom prst="rect">
             <a:avLst/>
@@ -5724,7 +6238,7 @@
             <a:r>
               <a:rPr lang="en-US" sz="1150" b="1" dirty="0">
                 <a:solidFill>
-                  <a:srgbClr val="E8EEF5"/>
+                  <a:srgbClr val="EAF1F8"/>
                 </a:solidFill>
                 <a:latin typeface="Calibri" pitchFamily="34" charset="0"/>
                 <a:ea typeface="Calibri" pitchFamily="34" charset="-122"/>
@@ -5738,22 +6252,61 @@
       </p:sp>
       <p:sp>
         <p:nvSpPr>
-          <p:cNvPr id="10" name="Shape 8"/>
-          <p:cNvSpPr/>
-          <p:nvPr/>
-        </p:nvSpPr>
-        <p:spPr>
-          <a:xfrm>
-            <a:off x="3310128" y="1920240"/>
-            <a:ext cx="1234440" cy="777240"/>
+          <p:cNvPr id="14" name="Text 12"/>
+          <p:cNvSpPr/>
+          <p:nvPr/>
+        </p:nvSpPr>
+        <p:spPr>
+          <a:xfrm>
+            <a:off x="3115056" y="1920240"/>
+            <a:ext cx="237744" cy="822960"/>
+          </a:xfrm>
+          <a:prstGeom prst="rect">
+            <a:avLst/>
+          </a:prstGeom>
+          <a:noFill/>
+          <a:ln/>
+        </p:spPr>
+        <p:txBody>
+          <a:bodyPr wrap="square" lIns="0" tIns="0" rIns="0" bIns="0" rtlCol="0" anchor="ctr"/>
+          <a:lstStyle/>
+          <a:p>
+            <a:pPr algn="ctr" indent="0" marL="0">
+              <a:buNone/>
+            </a:pPr>
+            <a:r>
+              <a:rPr lang="en-US" sz="1800" b="1" dirty="0">
+                <a:solidFill>
+                  <a:srgbClr val="22D3EE"/>
+                </a:solidFill>
+                <a:latin typeface="Trebuchet MS" pitchFamily="34" charset="0"/>
+                <a:ea typeface="Trebuchet MS" pitchFamily="34" charset="-122"/>
+                <a:cs typeface="Trebuchet MS" pitchFamily="34" charset="-120"/>
+              </a:rPr>
+              <a:t>›</a:t>
+            </a:r>
+            <a:endParaRPr lang="en-US" sz="1800" dirty="0"/>
+          </a:p>
+        </p:txBody>
+      </p:sp>
+      <p:sp>
+        <p:nvSpPr>
+          <p:cNvPr id="15" name="Shape 13"/>
+          <p:cNvSpPr/>
+          <p:nvPr/>
+        </p:nvSpPr>
+        <p:spPr>
+          <a:xfrm>
+            <a:off x="3316224" y="1920240"/>
+            <a:ext cx="1219200" cy="822960"/>
           </a:xfrm>
           <a:prstGeom prst="roundRect">
             <a:avLst>
-              <a:gd name="adj" fmla="val 8235"/>
+              <a:gd name="adj" fmla="val 8889"/>
             </a:avLst>
           </a:prstGeom>
           <a:solidFill>
-            <a:srgbClr val="12293D"/>
+            <a:srgbClr val="13283C"/>
           </a:solidFill>
           <a:ln w="15875">
             <a:solidFill>
@@ -5761,18 +6314,45 @@
             </a:solidFill>
             <a:prstDash val="solid"/>
           </a:ln>
-        </p:spPr>
-      </p:sp>
-      <p:sp>
-        <p:nvSpPr>
-          <p:cNvPr id="11" name="Text 9"/>
-          <p:cNvSpPr/>
-          <p:nvPr/>
-        </p:nvSpPr>
-        <p:spPr>
-          <a:xfrm>
-            <a:off x="3346704" y="1920240"/>
-            <a:ext cx="1161288" cy="777240"/>
+          <a:effectLst>
+            <a:outerShdw sx="100000" sy="100000" kx="0" ky="0" algn="bl" rotWithShape="0" blurRad="50800" dist="25400" dir="5400000">
+              <a:srgbClr val="000000">
+                <a:alpha val="40000"/>
+              </a:srgbClr>
+            </a:outerShdw>
+          </a:effectLst>
+        </p:spPr>
+      </p:sp>
+      <p:sp>
+        <p:nvSpPr>
+          <p:cNvPr id="16" name="Shape 14"/>
+          <p:cNvSpPr/>
+          <p:nvPr/>
+        </p:nvSpPr>
+        <p:spPr>
+          <a:xfrm>
+            <a:off x="3425952" y="2066544"/>
+            <a:ext cx="999744" cy="27432"/>
+          </a:xfrm>
+          <a:prstGeom prst="rect">
+            <a:avLst/>
+          </a:prstGeom>
+          <a:solidFill>
+            <a:srgbClr val="22D3EE"/>
+          </a:solidFill>
+          <a:ln/>
+        </p:spPr>
+      </p:sp>
+      <p:sp>
+        <p:nvSpPr>
+          <p:cNvPr id="17" name="Text 15"/>
+          <p:cNvSpPr/>
+          <p:nvPr/>
+        </p:nvSpPr>
+        <p:spPr>
+          <a:xfrm>
+            <a:off x="3352800" y="2029968"/>
+            <a:ext cx="1146048" cy="713232"/>
           </a:xfrm>
           <a:prstGeom prst="rect">
             <a:avLst/>
@@ -5790,7 +6370,7 @@
             <a:r>
               <a:rPr lang="en-US" sz="1150" b="1" dirty="0">
                 <a:solidFill>
-                  <a:srgbClr val="E8EEF5"/>
+                  <a:srgbClr val="EAF1F8"/>
                 </a:solidFill>
                 <a:latin typeface="Calibri" pitchFamily="34" charset="0"/>
                 <a:ea typeface="Calibri" pitchFamily="34" charset="-122"/>
@@ -5804,22 +6384,61 @@
       </p:sp>
       <p:sp>
         <p:nvSpPr>
-          <p:cNvPr id="12" name="Shape 10"/>
-          <p:cNvSpPr/>
-          <p:nvPr/>
-        </p:nvSpPr>
-        <p:spPr>
-          <a:xfrm>
-            <a:off x="4690872" y="1920240"/>
-            <a:ext cx="1234440" cy="777240"/>
+          <p:cNvPr id="18" name="Text 16"/>
+          <p:cNvSpPr/>
+          <p:nvPr/>
+        </p:nvSpPr>
+        <p:spPr>
+          <a:xfrm>
+            <a:off x="4498848" y="1920240"/>
+            <a:ext cx="237744" cy="822960"/>
+          </a:xfrm>
+          <a:prstGeom prst="rect">
+            <a:avLst/>
+          </a:prstGeom>
+          <a:noFill/>
+          <a:ln/>
+        </p:spPr>
+        <p:txBody>
+          <a:bodyPr wrap="square" lIns="0" tIns="0" rIns="0" bIns="0" rtlCol="0" anchor="ctr"/>
+          <a:lstStyle/>
+          <a:p>
+            <a:pPr algn="ctr" indent="0" marL="0">
+              <a:buNone/>
+            </a:pPr>
+            <a:r>
+              <a:rPr lang="en-US" sz="1800" b="1" dirty="0">
+                <a:solidFill>
+                  <a:srgbClr val="22D3EE"/>
+                </a:solidFill>
+                <a:latin typeface="Trebuchet MS" pitchFamily="34" charset="0"/>
+                <a:ea typeface="Trebuchet MS" pitchFamily="34" charset="-122"/>
+                <a:cs typeface="Trebuchet MS" pitchFamily="34" charset="-120"/>
+              </a:rPr>
+              <a:t>›</a:t>
+            </a:r>
+            <a:endParaRPr lang="en-US" sz="1800" dirty="0"/>
+          </a:p>
+        </p:txBody>
+      </p:sp>
+      <p:sp>
+        <p:nvSpPr>
+          <p:cNvPr id="19" name="Shape 17"/>
+          <p:cNvSpPr/>
+          <p:nvPr/>
+        </p:nvSpPr>
+        <p:spPr>
+          <a:xfrm>
+            <a:off x="4700016" y="1920240"/>
+            <a:ext cx="1219200" cy="822960"/>
           </a:xfrm>
           <a:prstGeom prst="roundRect">
             <a:avLst>
-              <a:gd name="adj" fmla="val 8235"/>
+              <a:gd name="adj" fmla="val 8889"/>
             </a:avLst>
           </a:prstGeom>
           <a:solidFill>
-            <a:srgbClr val="12293D"/>
+            <a:srgbClr val="13283C"/>
           </a:solidFill>
           <a:ln w="15875">
             <a:solidFill>
@@ -5827,18 +6446,45 @@
             </a:solidFill>
             <a:prstDash val="solid"/>
           </a:ln>
-        </p:spPr>
-      </p:sp>
-      <p:sp>
-        <p:nvSpPr>
-          <p:cNvPr id="13" name="Text 11"/>
-          <p:cNvSpPr/>
-          <p:nvPr/>
-        </p:nvSpPr>
-        <p:spPr>
-          <a:xfrm>
-            <a:off x="4727448" y="1920240"/>
-            <a:ext cx="1161288" cy="777240"/>
+          <a:effectLst>
+            <a:outerShdw sx="100000" sy="100000" kx="0" ky="0" algn="bl" rotWithShape="0" blurRad="50800" dist="25400" dir="5400000">
+              <a:srgbClr val="000000">
+                <a:alpha val="40000"/>
+              </a:srgbClr>
+            </a:outerShdw>
+          </a:effectLst>
+        </p:spPr>
+      </p:sp>
+      <p:sp>
+        <p:nvSpPr>
+          <p:cNvPr id="20" name="Shape 18"/>
+          <p:cNvSpPr/>
+          <p:nvPr/>
+        </p:nvSpPr>
+        <p:spPr>
+          <a:xfrm>
+            <a:off x="4809744" y="2066544"/>
+            <a:ext cx="999744" cy="27432"/>
+          </a:xfrm>
+          <a:prstGeom prst="rect">
+            <a:avLst/>
+          </a:prstGeom>
+          <a:solidFill>
+            <a:srgbClr val="22D3EE"/>
+          </a:solidFill>
+          <a:ln/>
+        </p:spPr>
+      </p:sp>
+      <p:sp>
+        <p:nvSpPr>
+          <p:cNvPr id="21" name="Text 19"/>
+          <p:cNvSpPr/>
+          <p:nvPr/>
+        </p:nvSpPr>
+        <p:spPr>
+          <a:xfrm>
+            <a:off x="4736592" y="2029968"/>
+            <a:ext cx="1146048" cy="713232"/>
           </a:xfrm>
           <a:prstGeom prst="rect">
             <a:avLst/>
@@ -5856,7 +6502,7 @@
             <a:r>
               <a:rPr lang="en-US" sz="1150" b="1" dirty="0">
                 <a:solidFill>
-                  <a:srgbClr val="E8EEF5"/>
+                  <a:srgbClr val="EAF1F8"/>
                 </a:solidFill>
                 <a:latin typeface="Calibri" pitchFamily="34" charset="0"/>
                 <a:ea typeface="Calibri" pitchFamily="34" charset="-122"/>
@@ -5873,7 +6519,7 @@
             <a:r>
               <a:rPr lang="en-US" sz="1150" b="1" dirty="0">
                 <a:solidFill>
-                  <a:srgbClr val="E8EEF5"/>
+                  <a:srgbClr val="EAF1F8"/>
                 </a:solidFill>
                 <a:latin typeface="Calibri" pitchFamily="34" charset="0"/>
                 <a:ea typeface="Calibri" pitchFamily="34" charset="-122"/>
@@ -5887,22 +6533,61 @@
       </p:sp>
       <p:sp>
         <p:nvSpPr>
-          <p:cNvPr id="14" name="Shape 12"/>
-          <p:cNvSpPr/>
-          <p:nvPr/>
-        </p:nvSpPr>
-        <p:spPr>
-          <a:xfrm>
-            <a:off x="6071616" y="1920240"/>
-            <a:ext cx="1234440" cy="777240"/>
+          <p:cNvPr id="22" name="Text 20"/>
+          <p:cNvSpPr/>
+          <p:nvPr/>
+        </p:nvSpPr>
+        <p:spPr>
+          <a:xfrm>
+            <a:off x="5882640" y="1920240"/>
+            <a:ext cx="237744" cy="822960"/>
+          </a:xfrm>
+          <a:prstGeom prst="rect">
+            <a:avLst/>
+          </a:prstGeom>
+          <a:noFill/>
+          <a:ln/>
+        </p:spPr>
+        <p:txBody>
+          <a:bodyPr wrap="square" lIns="0" tIns="0" rIns="0" bIns="0" rtlCol="0" anchor="ctr"/>
+          <a:lstStyle/>
+          <a:p>
+            <a:pPr algn="ctr" indent="0" marL="0">
+              <a:buNone/>
+            </a:pPr>
+            <a:r>
+              <a:rPr lang="en-US" sz="1800" b="1" dirty="0">
+                <a:solidFill>
+                  <a:srgbClr val="22D3EE"/>
+                </a:solidFill>
+                <a:latin typeface="Trebuchet MS" pitchFamily="34" charset="0"/>
+                <a:ea typeface="Trebuchet MS" pitchFamily="34" charset="-122"/>
+                <a:cs typeface="Trebuchet MS" pitchFamily="34" charset="-120"/>
+              </a:rPr>
+              <a:t>›</a:t>
+            </a:r>
+            <a:endParaRPr lang="en-US" sz="1800" dirty="0"/>
+          </a:p>
+        </p:txBody>
+      </p:sp>
+      <p:sp>
+        <p:nvSpPr>
+          <p:cNvPr id="23" name="Shape 21"/>
+          <p:cNvSpPr/>
+          <p:nvPr/>
+        </p:nvSpPr>
+        <p:spPr>
+          <a:xfrm>
+            <a:off x="6083808" y="1920240"/>
+            <a:ext cx="1219200" cy="822960"/>
           </a:xfrm>
           <a:prstGeom prst="roundRect">
             <a:avLst>
-              <a:gd name="adj" fmla="val 8235"/>
+              <a:gd name="adj" fmla="val 8889"/>
             </a:avLst>
           </a:prstGeom>
           <a:solidFill>
-            <a:srgbClr val="12293D"/>
+            <a:srgbClr val="13283C"/>
           </a:solidFill>
           <a:ln w="15875">
             <a:solidFill>
@@ -5910,18 +6595,45 @@
             </a:solidFill>
             <a:prstDash val="solid"/>
           </a:ln>
-        </p:spPr>
-      </p:sp>
-      <p:sp>
-        <p:nvSpPr>
-          <p:cNvPr id="15" name="Text 13"/>
-          <p:cNvSpPr/>
-          <p:nvPr/>
-        </p:nvSpPr>
-        <p:spPr>
-          <a:xfrm>
-            <a:off x="6108192" y="1920240"/>
-            <a:ext cx="1161288" cy="777240"/>
+          <a:effectLst>
+            <a:outerShdw sx="100000" sy="100000" kx="0" ky="0" algn="bl" rotWithShape="0" blurRad="50800" dist="25400" dir="5400000">
+              <a:srgbClr val="000000">
+                <a:alpha val="40000"/>
+              </a:srgbClr>
+            </a:outerShdw>
+          </a:effectLst>
+        </p:spPr>
+      </p:sp>
+      <p:sp>
+        <p:nvSpPr>
+          <p:cNvPr id="24" name="Shape 22"/>
+          <p:cNvSpPr/>
+          <p:nvPr/>
+        </p:nvSpPr>
+        <p:spPr>
+          <a:xfrm>
+            <a:off x="6193536" y="2066544"/>
+            <a:ext cx="999744" cy="27432"/>
+          </a:xfrm>
+          <a:prstGeom prst="rect">
+            <a:avLst/>
+          </a:prstGeom>
+          <a:solidFill>
+            <a:srgbClr val="22D3EE"/>
+          </a:solidFill>
+          <a:ln/>
+        </p:spPr>
+      </p:sp>
+      <p:sp>
+        <p:nvSpPr>
+          <p:cNvPr id="25" name="Text 23"/>
+          <p:cNvSpPr/>
+          <p:nvPr/>
+        </p:nvSpPr>
+        <p:spPr>
+          <a:xfrm>
+            <a:off x="6120384" y="2029968"/>
+            <a:ext cx="1146048" cy="713232"/>
           </a:xfrm>
           <a:prstGeom prst="rect">
             <a:avLst/>
@@ -5939,7 +6651,7 @@
             <a:r>
               <a:rPr lang="en-US" sz="1150" b="1" dirty="0">
                 <a:solidFill>
-                  <a:srgbClr val="E8EEF5"/>
+                  <a:srgbClr val="EAF1F8"/>
                 </a:solidFill>
                 <a:latin typeface="Calibri" pitchFamily="34" charset="0"/>
                 <a:ea typeface="Calibri" pitchFamily="34" charset="-122"/>
@@ -5953,22 +6665,61 @@
       </p:sp>
       <p:sp>
         <p:nvSpPr>
-          <p:cNvPr id="16" name="Shape 14"/>
-          <p:cNvSpPr/>
-          <p:nvPr/>
-        </p:nvSpPr>
-        <p:spPr>
-          <a:xfrm>
-            <a:off x="7452360" y="1920240"/>
-            <a:ext cx="1234440" cy="777240"/>
+          <p:cNvPr id="26" name="Text 24"/>
+          <p:cNvSpPr/>
+          <p:nvPr/>
+        </p:nvSpPr>
+        <p:spPr>
+          <a:xfrm>
+            <a:off x="7266432" y="1920240"/>
+            <a:ext cx="237744" cy="822960"/>
+          </a:xfrm>
+          <a:prstGeom prst="rect">
+            <a:avLst/>
+          </a:prstGeom>
+          <a:noFill/>
+          <a:ln/>
+        </p:spPr>
+        <p:txBody>
+          <a:bodyPr wrap="square" lIns="0" tIns="0" rIns="0" bIns="0" rtlCol="0" anchor="ctr"/>
+          <a:lstStyle/>
+          <a:p>
+            <a:pPr algn="ctr" indent="0" marL="0">
+              <a:buNone/>
+            </a:pPr>
+            <a:r>
+              <a:rPr lang="en-US" sz="1800" b="1" dirty="0">
+                <a:solidFill>
+                  <a:srgbClr val="22D3EE"/>
+                </a:solidFill>
+                <a:latin typeface="Trebuchet MS" pitchFamily="34" charset="0"/>
+                <a:ea typeface="Trebuchet MS" pitchFamily="34" charset="-122"/>
+                <a:cs typeface="Trebuchet MS" pitchFamily="34" charset="-120"/>
+              </a:rPr>
+              <a:t>›</a:t>
+            </a:r>
+            <a:endParaRPr lang="en-US" sz="1800" dirty="0"/>
+          </a:p>
+        </p:txBody>
+      </p:sp>
+      <p:sp>
+        <p:nvSpPr>
+          <p:cNvPr id="27" name="Shape 25"/>
+          <p:cNvSpPr/>
+          <p:nvPr/>
+        </p:nvSpPr>
+        <p:spPr>
+          <a:xfrm>
+            <a:off x="7467600" y="1920240"/>
+            <a:ext cx="1219200" cy="822960"/>
           </a:xfrm>
           <a:prstGeom prst="roundRect">
             <a:avLst>
-              <a:gd name="adj" fmla="val 8235"/>
+              <a:gd name="adj" fmla="val 8889"/>
             </a:avLst>
           </a:prstGeom>
           <a:solidFill>
-            <a:srgbClr val="12293D"/>
+            <a:srgbClr val="13283C"/>
           </a:solidFill>
           <a:ln w="15875">
             <a:solidFill>
@@ -5976,18 +6727,45 @@
             </a:solidFill>
             <a:prstDash val="solid"/>
           </a:ln>
-        </p:spPr>
-      </p:sp>
-      <p:sp>
-        <p:nvSpPr>
-          <p:cNvPr id="17" name="Text 15"/>
-          <p:cNvSpPr/>
-          <p:nvPr/>
-        </p:nvSpPr>
-        <p:spPr>
-          <a:xfrm>
-            <a:off x="7488936" y="1920240"/>
-            <a:ext cx="1161288" cy="777240"/>
+          <a:effectLst>
+            <a:outerShdw sx="100000" sy="100000" kx="0" ky="0" algn="bl" rotWithShape="0" blurRad="50800" dist="25400" dir="5400000">
+              <a:srgbClr val="000000">
+                <a:alpha val="40000"/>
+              </a:srgbClr>
+            </a:outerShdw>
+          </a:effectLst>
+        </p:spPr>
+      </p:sp>
+      <p:sp>
+        <p:nvSpPr>
+          <p:cNvPr id="28" name="Shape 26"/>
+          <p:cNvSpPr/>
+          <p:nvPr/>
+        </p:nvSpPr>
+        <p:spPr>
+          <a:xfrm>
+            <a:off x="7577328" y="2066544"/>
+            <a:ext cx="999744" cy="27432"/>
+          </a:xfrm>
+          <a:prstGeom prst="rect">
+            <a:avLst/>
+          </a:prstGeom>
+          <a:solidFill>
+            <a:srgbClr val="22D3EE"/>
+          </a:solidFill>
+          <a:ln/>
+        </p:spPr>
+      </p:sp>
+      <p:sp>
+        <p:nvSpPr>
+          <p:cNvPr id="29" name="Text 27"/>
+          <p:cNvSpPr/>
+          <p:nvPr/>
+        </p:nvSpPr>
+        <p:spPr>
+          <a:xfrm>
+            <a:off x="7504176" y="2029968"/>
+            <a:ext cx="1146048" cy="713232"/>
           </a:xfrm>
           <a:prstGeom prst="rect">
             <a:avLst/>
@@ -6005,7 +6783,7 @@
             <a:r>
               <a:rPr lang="en-US" sz="1150" b="1" dirty="0">
                 <a:solidFill>
-                  <a:srgbClr val="E8EEF5"/>
+                  <a:srgbClr val="EAF1F8"/>
                 </a:solidFill>
                 <a:latin typeface="Calibri" pitchFamily="34" charset="0"/>
                 <a:ea typeface="Calibri" pitchFamily="34" charset="-122"/>
@@ -6019,7 +6797,7 @@
       </p:sp>
       <p:sp>
         <p:nvSpPr>
-          <p:cNvPr id="18" name="Text 16"/>
+          <p:cNvPr id="30" name="Text 28"/>
           <p:cNvSpPr/>
           <p:nvPr/>
         </p:nvSpPr>
@@ -6048,7 +6826,7 @@
             <a:r>
               <a:rPr lang="en-US" sz="1500" b="1" dirty="0">
                 <a:solidFill>
-                  <a:srgbClr val="E8EEF5"/>
+                  <a:srgbClr val="EAF1F8"/>
                 </a:solidFill>
                 <a:latin typeface="Calibri" pitchFamily="34" charset="0"/>
                 <a:ea typeface="Calibri" pitchFamily="34" charset="-122"/>
@@ -6069,7 +6847,7 @@
             <a:r>
               <a:rPr lang="en-US" sz="1500" b="1" dirty="0">
                 <a:solidFill>
-                  <a:srgbClr val="E8EEF5"/>
+                  <a:srgbClr val="EAF1F8"/>
                 </a:solidFill>
                 <a:latin typeface="Calibri" pitchFamily="34" charset="0"/>
                 <a:ea typeface="Calibri" pitchFamily="34" charset="-122"/>
@@ -6090,7 +6868,7 @@
             <a:r>
               <a:rPr lang="en-US" sz="1500" dirty="0">
                 <a:solidFill>
-                  <a:srgbClr val="E8EEF5"/>
+                  <a:srgbClr val="EAF1F8"/>
                 </a:solidFill>
                 <a:latin typeface="Calibri" pitchFamily="34" charset="0"/>
                 <a:ea typeface="Calibri" pitchFamily="34" charset="-122"/>
@@ -6116,7 +6894,7 @@
     <p:bg>
       <p:bgPr>
         <a:solidFill>
-          <a:srgbClr val="0B1B2B"/>
+          <a:srgbClr val="0A1622"/>
         </a:solidFill>
       </p:bgPr>
     </p:bg>
@@ -6154,6 +6932,13 @@
             <a:srgbClr val="22D3EE"/>
           </a:solidFill>
           <a:ln/>
+          <a:effectLst>
+            <a:outerShdw sx="100000" sy="100000" kx="0" ky="0" algn="bl" rotWithShape="0" blurRad="50800" dist="25400" dir="5400000">
+              <a:srgbClr val="000000">
+                <a:alpha val="40000"/>
+              </a:srgbClr>
+            </a:outerShdw>
+          </a:effectLst>
         </p:spPr>
       </p:sp>
       <p:sp>
@@ -6183,7 +6968,7 @@
             <a:r>
               <a:rPr lang="en-US" sz="2200" b="1" dirty="0">
                 <a:solidFill>
-                  <a:srgbClr val="0B1B2B"/>
+                  <a:srgbClr val="0A1622"/>
                 </a:solidFill>
                 <a:latin typeface="Consolas" pitchFamily="34" charset="0"/>
                 <a:ea typeface="Consolas" pitchFamily="34" charset="-122"/>
@@ -6281,33 +7066,142 @@
         </p:nvSpPr>
         <p:spPr>
           <a:xfrm>
+            <a:off x="1298448" y="1316736"/>
+            <a:ext cx="1005840" cy="32004"/>
+          </a:xfrm>
+          <a:prstGeom prst="rect">
+            <a:avLst/>
+          </a:prstGeom>
+          <a:solidFill>
+            <a:srgbClr val="22D3EE"/>
+          </a:solidFill>
+          <a:ln/>
+        </p:spPr>
+      </p:sp>
+      <p:sp>
+        <p:nvSpPr>
+          <p:cNvPr id="7" name="Shape 5"/>
+          <p:cNvSpPr/>
+          <p:nvPr/>
+        </p:nvSpPr>
+        <p:spPr>
+          <a:xfrm>
             <a:off x="548640" y="1691640"/>
             <a:ext cx="8046720" cy="2834640"/>
           </a:xfrm>
-          <a:prstGeom prst="rect">
-            <a:avLst/>
+          <a:prstGeom prst="roundRect">
+            <a:avLst>
+              <a:gd name="adj" fmla="val 1129"/>
+            </a:avLst>
           </a:prstGeom>
           <a:solidFill>
-            <a:srgbClr val="081320"/>
+            <a:srgbClr val="060F1A"/>
           </a:solidFill>
           <a:ln w="12700">
             <a:solidFill>
-              <a:srgbClr val="284963"/>
+              <a:srgbClr val="264862"/>
             </a:solidFill>
             <a:prstDash val="solid"/>
           </a:ln>
-        </p:spPr>
-      </p:sp>
-      <p:sp>
-        <p:nvSpPr>
-          <p:cNvPr id="7" name="Text 5"/>
-          <p:cNvSpPr/>
-          <p:nvPr/>
-        </p:nvSpPr>
-        <p:spPr>
-          <a:xfrm>
-            <a:off x="749808" y="1819656"/>
-            <a:ext cx="7644384" cy="2578608"/>
+          <a:effectLst>
+            <a:outerShdw sx="100000" sy="100000" kx="0" ky="0" algn="bl" rotWithShape="0" blurRad="88900" dist="38100" dir="5400000">
+              <a:srgbClr val="000000">
+                <a:alpha val="50000"/>
+              </a:srgbClr>
+            </a:outerShdw>
+          </a:effectLst>
+        </p:spPr>
+      </p:sp>
+      <p:sp>
+        <p:nvSpPr>
+          <p:cNvPr id="8" name="Shape 6"/>
+          <p:cNvSpPr/>
+          <p:nvPr/>
+        </p:nvSpPr>
+        <p:spPr>
+          <a:xfrm>
+            <a:off x="566928" y="1728216"/>
+            <a:ext cx="8010144" cy="274320"/>
+          </a:xfrm>
+          <a:prstGeom prst="rect">
+            <a:avLst/>
+          </a:prstGeom>
+          <a:solidFill>
+            <a:srgbClr val="13283C"/>
+          </a:solidFill>
+          <a:ln/>
+        </p:spPr>
+      </p:sp>
+      <p:sp>
+        <p:nvSpPr>
+          <p:cNvPr id="9" name="Shape 7"/>
+          <p:cNvSpPr/>
+          <p:nvPr/>
+        </p:nvSpPr>
+        <p:spPr>
+          <a:xfrm>
+            <a:off x="713232" y="1801368"/>
+            <a:ext cx="118872" cy="118872"/>
+          </a:xfrm>
+          <a:prstGeom prst="ellipse">
+            <a:avLst/>
+          </a:prstGeom>
+          <a:solidFill>
+            <a:srgbClr val="FB7185"/>
+          </a:solidFill>
+          <a:ln/>
+        </p:spPr>
+      </p:sp>
+      <p:sp>
+        <p:nvSpPr>
+          <p:cNvPr id="10" name="Shape 8"/>
+          <p:cNvSpPr/>
+          <p:nvPr/>
+        </p:nvSpPr>
+        <p:spPr>
+          <a:xfrm>
+            <a:off x="886968" y="1801368"/>
+            <a:ext cx="118872" cy="118872"/>
+          </a:xfrm>
+          <a:prstGeom prst="ellipse">
+            <a:avLst/>
+          </a:prstGeom>
+          <a:solidFill>
+            <a:srgbClr val="FBBF24"/>
+          </a:solidFill>
+          <a:ln/>
+        </p:spPr>
+      </p:sp>
+      <p:sp>
+        <p:nvSpPr>
+          <p:cNvPr id="11" name="Shape 9"/>
+          <p:cNvSpPr/>
+          <p:nvPr/>
+        </p:nvSpPr>
+        <p:spPr>
+          <a:xfrm>
+            <a:off x="1060704" y="1801368"/>
+            <a:ext cx="118872" cy="118872"/>
+          </a:xfrm>
+          <a:prstGeom prst="ellipse">
+            <a:avLst/>
+          </a:prstGeom>
+          <a:solidFill>
+            <a:srgbClr val="34D399"/>
+          </a:solidFill>
+          <a:ln/>
+        </p:spPr>
+      </p:sp>
+      <p:sp>
+        <p:nvSpPr>
+          <p:cNvPr id="12" name="Text 10"/>
+          <p:cNvSpPr/>
+          <p:nvPr/>
+        </p:nvSpPr>
+        <p:spPr>
+          <a:xfrm>
+            <a:off x="768096" y="2112264"/>
+            <a:ext cx="7626096" cy="2286000"/>
           </a:xfrm>
           <a:prstGeom prst="rect">
             <a:avLst/>
@@ -6487,7 +7381,7 @@
     <p:bg>
       <p:bgPr>
         <a:solidFill>
-          <a:srgbClr val="0B1B2B"/>
+          <a:srgbClr val="0A1622"/>
         </a:solidFill>
       </p:bgPr>
     </p:bg>
@@ -6525,6 +7419,13 @@
             <a:srgbClr val="22D3EE"/>
           </a:solidFill>
           <a:ln/>
+          <a:effectLst>
+            <a:outerShdw sx="100000" sy="100000" kx="0" ky="0" algn="bl" rotWithShape="0" blurRad="50800" dist="25400" dir="5400000">
+              <a:srgbClr val="000000">
+                <a:alpha val="40000"/>
+              </a:srgbClr>
+            </a:outerShdw>
+          </a:effectLst>
         </p:spPr>
       </p:sp>
       <p:sp>
@@ -6554,7 +7455,7 @@
             <a:r>
               <a:rPr lang="en-US" sz="2200" b="1" dirty="0">
                 <a:solidFill>
-                  <a:srgbClr val="0B1B2B"/>
+                  <a:srgbClr val="0A1622"/>
                 </a:solidFill>
                 <a:latin typeface="Consolas" pitchFamily="34" charset="0"/>
                 <a:ea typeface="Consolas" pitchFamily="34" charset="-122"/>
@@ -6652,14 +7553,36 @@
         </p:nvSpPr>
         <p:spPr>
           <a:xfrm>
+            <a:off x="1298448" y="1316736"/>
+            <a:ext cx="1005840" cy="32004"/>
+          </a:xfrm>
+          <a:prstGeom prst="rect">
+            <a:avLst/>
+          </a:prstGeom>
+          <a:solidFill>
+            <a:srgbClr val="22D3EE"/>
+          </a:solidFill>
+          <a:ln/>
+        </p:spPr>
+      </p:sp>
+      <p:sp>
+        <p:nvSpPr>
+          <p:cNvPr id="7" name="Shape 5"/>
+          <p:cNvSpPr/>
+          <p:nvPr/>
+        </p:nvSpPr>
+        <p:spPr>
+          <a:xfrm>
             <a:off x="548640" y="1691640"/>
             <a:ext cx="3886200" cy="2743200"/>
           </a:xfrm>
-          <a:prstGeom prst="rect">
-            <a:avLst/>
+          <a:prstGeom prst="roundRect">
+            <a:avLst>
+              <a:gd name="adj" fmla="val 1667"/>
+            </a:avLst>
           </a:prstGeom>
           <a:solidFill>
-            <a:srgbClr val="12293D"/>
+            <a:srgbClr val="13283C"/>
           </a:solidFill>
           <a:ln w="15875">
             <a:solidFill>
@@ -6667,18 +7590,25 @@
             </a:solidFill>
             <a:prstDash val="solid"/>
           </a:ln>
-        </p:spPr>
-      </p:sp>
-      <p:sp>
-        <p:nvSpPr>
-          <p:cNvPr id="7" name="Shape 5"/>
-          <p:cNvSpPr/>
-          <p:nvPr/>
-        </p:nvSpPr>
-        <p:spPr>
-          <a:xfrm>
-            <a:off x="548640" y="1691640"/>
-            <a:ext cx="82296" cy="2743200"/>
+          <a:effectLst>
+            <a:outerShdw sx="100000" sy="100000" kx="0" ky="0" algn="bl" rotWithShape="0" blurRad="88900" dist="38100" dir="5400000">
+              <a:srgbClr val="000000">
+                <a:alpha val="50000"/>
+              </a:srgbClr>
+            </a:outerShdw>
+          </a:effectLst>
+        </p:spPr>
+      </p:sp>
+      <p:sp>
+        <p:nvSpPr>
+          <p:cNvPr id="8" name="Shape 6"/>
+          <p:cNvSpPr/>
+          <p:nvPr/>
+        </p:nvSpPr>
+        <p:spPr>
+          <a:xfrm>
+            <a:off x="562356" y="1764792"/>
+            <a:ext cx="73152" cy="2596896"/>
           </a:xfrm>
           <a:prstGeom prst="rect">
             <a:avLst/>
@@ -6691,14 +7621,14 @@
       </p:sp>
       <p:sp>
         <p:nvSpPr>
-          <p:cNvPr id="8" name="Text 6"/>
-          <p:cNvSpPr/>
-          <p:nvPr/>
-        </p:nvSpPr>
-        <p:spPr>
-          <a:xfrm>
-            <a:off x="786384" y="1837944"/>
-            <a:ext cx="3502152" cy="384048"/>
+          <p:cNvPr id="9" name="Text 7"/>
+          <p:cNvSpPr/>
+          <p:nvPr/>
+        </p:nvSpPr>
+        <p:spPr>
+          <a:xfrm>
+            <a:off x="804672" y="1828800"/>
+            <a:ext cx="3483864" cy="384048"/>
           </a:xfrm>
           <a:prstGeom prst="rect">
             <a:avLst/>
@@ -6714,7 +7644,7 @@
               <a:buNone/>
             </a:pPr>
             <a:r>
-              <a:rPr lang="en-US" sz="1500" b="1" dirty="0">
+              <a:rPr lang="en-US" sz="1500" b="1" spc="50" kern="0" dirty="0">
                 <a:solidFill>
                   <a:srgbClr val="22D3EE"/>
                 </a:solidFill>
@@ -6730,14 +7660,34 @@
       </p:sp>
       <p:sp>
         <p:nvSpPr>
-          <p:cNvPr id="9" name="Text 7"/>
-          <p:cNvSpPr/>
-          <p:nvPr/>
-        </p:nvSpPr>
-        <p:spPr>
-          <a:xfrm>
-            <a:off x="786384" y="2276856"/>
-            <a:ext cx="3429000" cy="2011680"/>
+          <p:cNvPr id="10" name="Shape 8"/>
+          <p:cNvSpPr/>
+          <p:nvPr/>
+        </p:nvSpPr>
+        <p:spPr>
+          <a:xfrm>
+            <a:off x="804672" y="2221992"/>
+            <a:ext cx="3374136" cy="16459"/>
+          </a:xfrm>
+          <a:prstGeom prst="rect">
+            <a:avLst/>
+          </a:prstGeom>
+          <a:solidFill>
+            <a:srgbClr val="264862"/>
+          </a:solidFill>
+          <a:ln/>
+        </p:spPr>
+      </p:sp>
+      <p:sp>
+        <p:nvSpPr>
+          <p:cNvPr id="11" name="Text 9"/>
+          <p:cNvSpPr/>
+          <p:nvPr/>
+        </p:nvSpPr>
+        <p:spPr>
+          <a:xfrm>
+            <a:off x="804672" y="2331720"/>
+            <a:ext cx="3410712" cy="1956816"/>
           </a:xfrm>
           <a:prstGeom prst="rect">
             <a:avLst/>
@@ -6759,7 +7709,7 @@
             <a:r>
               <a:rPr lang="en-US" sz="1250" dirty="0">
                 <a:solidFill>
-                  <a:srgbClr val="E8EEF5"/>
+                  <a:srgbClr val="EAF1F8"/>
                 </a:solidFill>
                 <a:latin typeface="Calibri" pitchFamily="34" charset="0"/>
                 <a:ea typeface="Calibri" pitchFamily="34" charset="-122"/>
@@ -6780,7 +7730,7 @@
             <a:r>
               <a:rPr lang="en-US" sz="1250" dirty="0">
                 <a:solidFill>
-                  <a:srgbClr val="E8EEF5"/>
+                  <a:srgbClr val="EAF1F8"/>
                 </a:solidFill>
                 <a:latin typeface="Calibri" pitchFamily="34" charset="0"/>
                 <a:ea typeface="Calibri" pitchFamily="34" charset="-122"/>
@@ -6801,7 +7751,7 @@
             <a:r>
               <a:rPr lang="en-US" sz="1250" dirty="0">
                 <a:solidFill>
-                  <a:srgbClr val="E8EEF5"/>
+                  <a:srgbClr val="EAF1F8"/>
                 </a:solidFill>
                 <a:latin typeface="Calibri" pitchFamily="34" charset="0"/>
                 <a:ea typeface="Calibri" pitchFamily="34" charset="-122"/>
@@ -6822,7 +7772,7 @@
             <a:r>
               <a:rPr lang="en-US" sz="1250" dirty="0">
                 <a:solidFill>
-                  <a:srgbClr val="E8EEF5"/>
+                  <a:srgbClr val="EAF1F8"/>
                 </a:solidFill>
                 <a:latin typeface="Calibri" pitchFamily="34" charset="0"/>
                 <a:ea typeface="Calibri" pitchFamily="34" charset="-122"/>
@@ -6836,7 +7786,7 @@
       </p:sp>
       <p:sp>
         <p:nvSpPr>
-          <p:cNvPr id="10" name="Shape 8"/>
+          <p:cNvPr id="12" name="Shape 10"/>
           <p:cNvSpPr/>
           <p:nvPr/>
         </p:nvSpPr>
@@ -6845,11 +7795,13 @@
             <a:off x="4663440" y="1691640"/>
             <a:ext cx="3931920" cy="2743200"/>
           </a:xfrm>
-          <a:prstGeom prst="rect">
-            <a:avLst/>
+          <a:prstGeom prst="roundRect">
+            <a:avLst>
+              <a:gd name="adj" fmla="val 1667"/>
+            </a:avLst>
           </a:prstGeom>
           <a:solidFill>
-            <a:srgbClr val="12293D"/>
+            <a:srgbClr val="13283C"/>
           </a:solidFill>
           <a:ln w="15875">
             <a:solidFill>
@@ -6857,18 +7809,25 @@
             </a:solidFill>
             <a:prstDash val="solid"/>
           </a:ln>
-        </p:spPr>
-      </p:sp>
-      <p:sp>
-        <p:nvSpPr>
-          <p:cNvPr id="11" name="Shape 9"/>
-          <p:cNvSpPr/>
-          <p:nvPr/>
-        </p:nvSpPr>
-        <p:spPr>
-          <a:xfrm>
-            <a:off x="4663440" y="1691640"/>
-            <a:ext cx="82296" cy="2743200"/>
+          <a:effectLst>
+            <a:outerShdw sx="100000" sy="100000" kx="0" ky="0" algn="bl" rotWithShape="0" blurRad="88900" dist="38100" dir="5400000">
+              <a:srgbClr val="000000">
+                <a:alpha val="50000"/>
+              </a:srgbClr>
+            </a:outerShdw>
+          </a:effectLst>
+        </p:spPr>
+      </p:sp>
+      <p:sp>
+        <p:nvSpPr>
+          <p:cNvPr id="13" name="Shape 11"/>
+          <p:cNvSpPr/>
+          <p:nvPr/>
+        </p:nvSpPr>
+        <p:spPr>
+          <a:xfrm>
+            <a:off x="4677156" y="1764792"/>
+            <a:ext cx="73152" cy="2596896"/>
           </a:xfrm>
           <a:prstGeom prst="rect">
             <a:avLst/>
@@ -6881,14 +7840,14 @@
       </p:sp>
       <p:sp>
         <p:nvSpPr>
-          <p:cNvPr id="12" name="Text 10"/>
-          <p:cNvSpPr/>
-          <p:nvPr/>
-        </p:nvSpPr>
-        <p:spPr>
-          <a:xfrm>
-            <a:off x="4901184" y="1837944"/>
-            <a:ext cx="3547872" cy="384048"/>
+          <p:cNvPr id="14" name="Text 12"/>
+          <p:cNvSpPr/>
+          <p:nvPr/>
+        </p:nvSpPr>
+        <p:spPr>
+          <a:xfrm>
+            <a:off x="4919472" y="1828800"/>
+            <a:ext cx="3529584" cy="384048"/>
           </a:xfrm>
           <a:prstGeom prst="rect">
             <a:avLst/>
@@ -6904,7 +7863,7 @@
               <a:buNone/>
             </a:pPr>
             <a:r>
-              <a:rPr lang="en-US" sz="1500" b="1" dirty="0">
+              <a:rPr lang="en-US" sz="1500" b="1" spc="50" kern="0" dirty="0">
                 <a:solidFill>
                   <a:srgbClr val="FBBF24"/>
                 </a:solidFill>
@@ -6920,14 +7879,34 @@
       </p:sp>
       <p:sp>
         <p:nvSpPr>
-          <p:cNvPr id="13" name="Text 11"/>
-          <p:cNvSpPr/>
-          <p:nvPr/>
-        </p:nvSpPr>
-        <p:spPr>
-          <a:xfrm>
-            <a:off x="4901184" y="2276856"/>
-            <a:ext cx="3474720" cy="2011680"/>
+          <p:cNvPr id="15" name="Shape 13"/>
+          <p:cNvSpPr/>
+          <p:nvPr/>
+        </p:nvSpPr>
+        <p:spPr>
+          <a:xfrm>
+            <a:off x="4919472" y="2221992"/>
+            <a:ext cx="3419856" cy="16459"/>
+          </a:xfrm>
+          <a:prstGeom prst="rect">
+            <a:avLst/>
+          </a:prstGeom>
+          <a:solidFill>
+            <a:srgbClr val="264862"/>
+          </a:solidFill>
+          <a:ln/>
+        </p:spPr>
+      </p:sp>
+      <p:sp>
+        <p:nvSpPr>
+          <p:cNvPr id="16" name="Text 14"/>
+          <p:cNvSpPr/>
+          <p:nvPr/>
+        </p:nvSpPr>
+        <p:spPr>
+          <a:xfrm>
+            <a:off x="4919472" y="2331720"/>
+            <a:ext cx="3456432" cy="1956816"/>
           </a:xfrm>
           <a:prstGeom prst="rect">
             <a:avLst/>
@@ -6949,7 +7928,7 @@
             <a:r>
               <a:rPr lang="en-US" sz="1250" dirty="0">
                 <a:solidFill>
-                  <a:srgbClr val="E8EEF5"/>
+                  <a:srgbClr val="EAF1F8"/>
                 </a:solidFill>
                 <a:latin typeface="Calibri" pitchFamily="34" charset="0"/>
                 <a:ea typeface="Calibri" pitchFamily="34" charset="-122"/>
@@ -6970,7 +7949,7 @@
             <a:r>
               <a:rPr lang="en-US" sz="1250" dirty="0">
                 <a:solidFill>
-                  <a:srgbClr val="E8EEF5"/>
+                  <a:srgbClr val="EAF1F8"/>
                 </a:solidFill>
                 <a:latin typeface="Calibri" pitchFamily="34" charset="0"/>
                 <a:ea typeface="Calibri" pitchFamily="34" charset="-122"/>
@@ -6991,7 +7970,7 @@
             <a:r>
               <a:rPr lang="en-US" sz="1250" dirty="0">
                 <a:solidFill>
-                  <a:srgbClr val="E8EEF5"/>
+                  <a:srgbClr val="EAF1F8"/>
                 </a:solidFill>
                 <a:latin typeface="Calibri" pitchFamily="34" charset="0"/>
                 <a:ea typeface="Calibri" pitchFamily="34" charset="-122"/>
@@ -7012,7 +7991,7 @@
             <a:r>
               <a:rPr lang="en-US" sz="1250" dirty="0">
                 <a:solidFill>
-                  <a:srgbClr val="E8EEF5"/>
+                  <a:srgbClr val="EAF1F8"/>
                 </a:solidFill>
                 <a:latin typeface="Calibri" pitchFamily="34" charset="0"/>
                 <a:ea typeface="Calibri" pitchFamily="34" charset="-122"/>
@@ -7038,7 +8017,7 @@
     <p:bg>
       <p:bgPr>
         <a:solidFill>
-          <a:srgbClr val="0B1B2B"/>
+          <a:srgbClr val="0A1622"/>
         </a:solidFill>
       </p:bgPr>
     </p:bg>
@@ -7076,6 +8055,13 @@
             <a:srgbClr val="22D3EE"/>
           </a:solidFill>
           <a:ln/>
+          <a:effectLst>
+            <a:outerShdw sx="100000" sy="100000" kx="0" ky="0" algn="bl" rotWithShape="0" blurRad="50800" dist="25400" dir="5400000">
+              <a:srgbClr val="000000">
+                <a:alpha val="40000"/>
+              </a:srgbClr>
+            </a:outerShdw>
+          </a:effectLst>
         </p:spPr>
       </p:sp>
       <p:sp>
@@ -7105,7 +8091,7 @@
             <a:r>
               <a:rPr lang="en-US" sz="2200" b="1" dirty="0">
                 <a:solidFill>
-                  <a:srgbClr val="0B1B2B"/>
+                  <a:srgbClr val="0A1622"/>
                 </a:solidFill>
                 <a:latin typeface="Consolas" pitchFamily="34" charset="0"/>
                 <a:ea typeface="Consolas" pitchFamily="34" charset="-122"/>
@@ -7203,14 +8189,36 @@
         </p:nvSpPr>
         <p:spPr>
           <a:xfrm>
+            <a:off x="1298448" y="1316736"/>
+            <a:ext cx="1005840" cy="32004"/>
+          </a:xfrm>
+          <a:prstGeom prst="rect">
+            <a:avLst/>
+          </a:prstGeom>
+          <a:solidFill>
+            <a:srgbClr val="22D3EE"/>
+          </a:solidFill>
+          <a:ln/>
+        </p:spPr>
+      </p:sp>
+      <p:sp>
+        <p:nvSpPr>
+          <p:cNvPr id="7" name="Shape 5"/>
+          <p:cNvSpPr/>
+          <p:nvPr/>
+        </p:nvSpPr>
+        <p:spPr>
+          <a:xfrm>
             <a:off x="548640" y="1920240"/>
             <a:ext cx="8046720" cy="1554480"/>
           </a:xfrm>
-          <a:prstGeom prst="rect">
-            <a:avLst/>
+          <a:prstGeom prst="roundRect">
+            <a:avLst>
+              <a:gd name="adj" fmla="val 2941"/>
+            </a:avLst>
           </a:prstGeom>
           <a:solidFill>
-            <a:srgbClr val="12293D"/>
+            <a:srgbClr val="13283C"/>
           </a:solidFill>
           <a:ln w="19050">
             <a:solidFill>
@@ -7218,18 +8226,25 @@
             </a:solidFill>
             <a:prstDash val="solid"/>
           </a:ln>
-        </p:spPr>
-      </p:sp>
-      <p:sp>
-        <p:nvSpPr>
-          <p:cNvPr id="7" name="Shape 5"/>
-          <p:cNvSpPr/>
-          <p:nvPr/>
-        </p:nvSpPr>
-        <p:spPr>
-          <a:xfrm>
-            <a:off x="548640" y="1920240"/>
-            <a:ext cx="91440" cy="1554480"/>
+          <a:effectLst>
+            <a:outerShdw sx="100000" sy="100000" kx="0" ky="0" algn="bl" rotWithShape="0" blurRad="88900" dist="38100" dir="5400000">
+              <a:srgbClr val="000000">
+                <a:alpha val="50000"/>
+              </a:srgbClr>
+            </a:outerShdw>
+          </a:effectLst>
+        </p:spPr>
+      </p:sp>
+      <p:sp>
+        <p:nvSpPr>
+          <p:cNvPr id="8" name="Shape 6"/>
+          <p:cNvSpPr/>
+          <p:nvPr/>
+        </p:nvSpPr>
+        <p:spPr>
+          <a:xfrm>
+            <a:off x="562356" y="1993392"/>
+            <a:ext cx="91440" cy="1408176"/>
           </a:xfrm>
           <a:prstGeom prst="rect">
             <a:avLst/>
@@ -7242,13 +8257,13 @@
       </p:sp>
       <p:sp>
         <p:nvSpPr>
-          <p:cNvPr id="8" name="Text 6"/>
-          <p:cNvSpPr/>
-          <p:nvPr/>
-        </p:nvSpPr>
-        <p:spPr>
-          <a:xfrm>
-            <a:off x="868680" y="2121408"/>
+          <p:cNvPr id="9" name="Text 7"/>
+          <p:cNvSpPr/>
+          <p:nvPr/>
+        </p:nvSpPr>
+        <p:spPr>
+          <a:xfrm>
+            <a:off x="896112" y="2121408"/>
             <a:ext cx="7498080" cy="777240"/>
           </a:xfrm>
           <a:prstGeom prst="rect">
@@ -7281,13 +8296,13 @@
       </p:sp>
       <p:sp>
         <p:nvSpPr>
-          <p:cNvPr id="9" name="Text 7"/>
-          <p:cNvSpPr/>
-          <p:nvPr/>
-        </p:nvSpPr>
-        <p:spPr>
-          <a:xfrm>
-            <a:off x="868680" y="2834640"/>
+          <p:cNvPr id="10" name="Text 8"/>
+          <p:cNvSpPr/>
+          <p:nvPr/>
+        </p:nvSpPr>
+        <p:spPr>
+          <a:xfrm>
+            <a:off x="896112" y="2834640"/>
             <a:ext cx="7498080" cy="548640"/>
           </a:xfrm>
           <a:prstGeom prst="rect">
@@ -7306,7 +8321,7 @@
             <a:r>
               <a:rPr lang="en-US" sz="1500" dirty="0">
                 <a:solidFill>
-                  <a:srgbClr val="E8EEF5"/>
+                  <a:srgbClr val="EAF1F8"/>
                 </a:solidFill>
                 <a:latin typeface="Calibri" pitchFamily="34" charset="0"/>
                 <a:ea typeface="Calibri" pitchFamily="34" charset="-122"/>
@@ -7320,7 +8335,7 @@
       </p:sp>
       <p:sp>
         <p:nvSpPr>
-          <p:cNvPr id="10" name="Text 8"/>
+          <p:cNvPr id="11" name="Text 9"/>
           <p:cNvSpPr/>
           <p:nvPr/>
         </p:nvSpPr>
@@ -7349,7 +8364,7 @@
             <a:r>
               <a:rPr lang="en-US" sz="1400" dirty="0">
                 <a:solidFill>
-                  <a:srgbClr val="E8EEF5"/>
+                  <a:srgbClr val="EAF1F8"/>
                 </a:solidFill>
                 <a:latin typeface="Calibri" pitchFamily="34" charset="0"/>
                 <a:ea typeface="Calibri" pitchFamily="34" charset="-122"/>
